--- a/frontend-arhitektura--dark-tech-with-fsd.pptx
+++ b/frontend-arhitektura--dark-tech-with-fsd.pptx
@@ -40,6 +40,9 @@
     <p:sldId id="285" r:id="rId37"/>
     <p:sldId id="286" r:id="rId38"/>
     <p:sldId id="287" r:id="rId39"/>
+    <p:sldId id="288" r:id="rId40"/>
+    <p:sldId id="289" r:id="rId41"/>
+    <p:sldId id="290" r:id="rId42"/>
   </p:sldIdLst>
   <p:sldSz cx="12179300" cy="6858000"/>
   <p:notesSz cx="6858000" cy="9144000"/>
@@ -1402,7 +1405,7 @@
       </p:grpSpPr>
       <p:sp>
         <p:nvSpPr>
-          <p:cNvPr id="336" name="Shape 336"/>
+          <p:cNvPr id="317" name="Shape 317"/>
           <p:cNvSpPr/>
           <p:nvPr>
             <p:ph type="sldImg"/>
@@ -1423,7 +1426,7 @@
       </p:sp>
       <p:sp>
         <p:nvSpPr>
-          <p:cNvPr id="337" name="Shape 337"/>
+          <p:cNvPr id="318" name="Shape 318"/>
           <p:cNvSpPr/>
           <p:nvPr>
             <p:ph type="body" sz="quarter" idx="1"/>
@@ -1436,11 +1439,15 @@
         </p:spPr>
         <p:txBody>
           <a:bodyPr/>
-          <a:lstStyle/>
+          <a:lstStyle>
+            <a:lvl1pPr>
+              <a:defRPr sz="1600"/>
+            </a:lvl1pPr>
+          </a:lstStyle>
           <a:p>
             <a:pPr/>
             <a:r>
-              <a:t>Feature-Sliced Design je arhitekturna metodologija specifično za frontend projekte. Definira točno gdje koji kod ide, kako se grupira i koje su dozvoljene ovisnosti između različitih dijelova. Cilj je da projekt bude razumljiv iz same strukture, bez da se čita svaka linija koda. To je upravo isti problem koji ima AI agent — počinje svaku sesiju s nula konteksta i mora brzo izgraditi mentalni model projekta.</a:t>
+              <a:t>Dakle, možemo zaključiti da dobra arhitektura smanjuje količinu konteksta potrebnog AI alatu da ispravno obavi svoj posao.</a:t>
             </a:r>
           </a:p>
         </p:txBody>
@@ -1472,7 +1479,7 @@
       </p:grpSpPr>
       <p:sp>
         <p:nvSpPr>
-          <p:cNvPr id="340" name="Shape 340"/>
+          <p:cNvPr id="326" name="Shape 326"/>
           <p:cNvSpPr/>
           <p:nvPr>
             <p:ph type="sldImg"/>
@@ -1493,7 +1500,7 @@
       </p:sp>
       <p:sp>
         <p:nvSpPr>
-          <p:cNvPr id="341" name="Shape 341"/>
+          <p:cNvPr id="327" name="Shape 327"/>
           <p:cNvSpPr/>
           <p:nvPr>
             <p:ph type="body" sz="quarter" idx="1"/>
@@ -1506,11 +1513,15 @@
         </p:spPr>
         <p:txBody>
           <a:bodyPr/>
-          <a:lstStyle/>
+          <a:lstStyle>
+            <a:lvl1pPr>
+              <a:defRPr sz="1600"/>
+            </a:lvl1pPr>
+          </a:lstStyle>
           <a:p>
             <a:pPr/>
             <a:r>
-              <a:t>Feature-Sliced Design je arhitekturna metodologija specifično za frontend projekte. Definira točno gdje koji kod ide, kako se grupira i koje su dozvoljene ovisnosti između različitih dijelova. Cilj je da projekt bude razumljiv iz same strukture, bez da se čita svaka linija koda. To je upravo isti problem koji ima AI agent — počinje svaku sesiju s nula konteksta i mora brzo izgraditi mentalni model projekta.</a:t>
+              <a:t>I konačno dolazimo do pitanja, kako zapravo možemo izgraditi dobru arhitekturu?</a:t>
             </a:r>
           </a:p>
         </p:txBody>
@@ -1542,7 +1553,7 @@
       </p:grpSpPr>
       <p:sp>
         <p:nvSpPr>
-          <p:cNvPr id="358" name="Shape 358"/>
+          <p:cNvPr id="335" name="Shape 335"/>
           <p:cNvSpPr/>
           <p:nvPr>
             <p:ph type="sldImg"/>
@@ -1563,7 +1574,7 @@
       </p:sp>
       <p:sp>
         <p:nvSpPr>
-          <p:cNvPr id="359" name="Shape 359"/>
+          <p:cNvPr id="336" name="Shape 336"/>
           <p:cNvSpPr/>
           <p:nvPr>
             <p:ph type="body" sz="quarter" idx="1"/>
@@ -1576,11 +1587,15 @@
         </p:spPr>
         <p:txBody>
           <a:bodyPr/>
-          <a:lstStyle/>
+          <a:lstStyle>
+            <a:lvl1pPr>
+              <a:defRPr sz="1600"/>
+            </a:lvl1pPr>
+          </a:lstStyle>
           <a:p>
             <a:pPr/>
             <a:r>
-              <a:t>FSD se svodi na tri temeljna pravila: slojevi koji definiraju hijerarhiju odgovornosti, slices i segments koji odvajaju domenu od tehničke svrhe, te public API koji definira jasan ugovor između modula. U sljedeća tri slidea ćemo proći svako od njih i vidjeti kako konkretno pomaže AI alatu.</a:t>
+              <a:t>Odgovor je: primjenom prave metodologije, a ta metodologija se naziva Feature-Sliced Design.</a:t>
             </a:r>
           </a:p>
         </p:txBody>
@@ -1612,7 +1627,7 @@
       </p:grpSpPr>
       <p:sp>
         <p:nvSpPr>
-          <p:cNvPr id="386" name="Shape 386"/>
+          <p:cNvPr id="348" name="Shape 348"/>
           <p:cNvSpPr/>
           <p:nvPr>
             <p:ph type="sldImg"/>
@@ -1633,7 +1648,7 @@
       </p:sp>
       <p:sp>
         <p:nvSpPr>
-          <p:cNvPr id="387" name="Shape 387"/>
+          <p:cNvPr id="349" name="Shape 349"/>
           <p:cNvSpPr/>
           <p:nvPr>
             <p:ph type="body" sz="quarter" idx="1"/>
@@ -1646,11 +1661,15 @@
         </p:spPr>
         <p:txBody>
           <a:bodyPr/>
-          <a:lstStyle/>
+          <a:lstStyle>
+            <a:lvl1pPr>
+              <a:defRPr sz="1600"/>
+            </a:lvl1pPr>
+          </a:lstStyle>
           <a:p>
             <a:pPr/>
             <a:r>
-              <a:t>Slojevi su prvo i najvažnije pravilo FSD-a. Šest slojeva, uvijek u istom redoslijedu: app, pages, widgets, features, entities, shared. Pravilo importa je jednosmjerno - viši sloj smije importati iz nižeg, ali nikad obrnuto. Cross-importi između slica istog sloja su zabranjeni. Konkretni benefit za AI: file tree postaje mapa odgovornosti, AI odmah zna gdje je što. Drugi benefit: jednosmjerni tok importa znači da AI ne ulazi u beskonačne lance ovisnosti. Sjetite se onog slidea gdje je Card.tsx imao 6 importa u 6 različitih smjerova - sa slojevima, svi importi vode samo prema dolje.</a:t>
+              <a:t>Feature-Sliced Design je arhitekturna metodologija za strukturiranje frontend aplikacija. U jednostavnom smislu - to je skup pravila i konvencija za organiziranje koda. Cilj je da projekt bude razumljiv iz same strukture, bez da se čita svaka linija koda. To je upravo isti problem koji ima AI agent - počinje svaku sesiju s nula konteksta i mora brzo izgraditi mentalni model projekta. Bitno je napomenuti da je ova metodologija namijenjena za “front-facing” aplikacije, a ne za librarye, backend i slično jer takve ne mogu puno benefita dobiti sa primjenom pravila, a u sljedećim slideovima vidjeti ćete i zašto.</a:t>
             </a:r>
           </a:p>
         </p:txBody>
@@ -1682,7 +1701,7 @@
       </p:grpSpPr>
       <p:sp>
         <p:nvSpPr>
-          <p:cNvPr id="403" name="Shape 403"/>
+          <p:cNvPr id="352" name="Shape 352"/>
           <p:cNvSpPr/>
           <p:nvPr>
             <p:ph type="sldImg"/>
@@ -1703,7 +1722,7 @@
       </p:sp>
       <p:sp>
         <p:nvSpPr>
-          <p:cNvPr id="404" name="Shape 404"/>
+          <p:cNvPr id="353" name="Shape 353"/>
           <p:cNvSpPr/>
           <p:nvPr>
             <p:ph type="body" sz="quarter" idx="1"/>
@@ -1718,10 +1737,19 @@
           <a:bodyPr/>
           <a:lstStyle/>
           <a:p>
-            <a:pPr/>
-            <a:r>
-              <a:t>Drugo pravilo razdvaja što od kako. Slice predstavlja jednu poslovnu domenu - auth, profile-edit, like-post. Unutar slica imamo segmente koji grupiraju kod po tehničkoj svrsi - ui, model, api, lib. Kako ovo pomaže AI-u? Prvo, granice slica znače da AI ostaje unutar jedne domene dok radi, ne vuče u kontekst kod iz drugih featurea. Drugo, segmenti su isti u svakom slice-u - AI nauči obrazac jednom i može ga primijeniti svugdje. Domain-based naming, user.ts a ne types.ts, daje AI-u jak semantički signal i kod tekstualne pretrage i kod embeddinga.</a:t>
-            </a:r>
+            <a:pPr>
+              <a:defRPr sz="1600"/>
+            </a:pPr>
+            <a:r>
+              <a:t>Prvi koncept i prva razina organizacije FSD-a su layeri koje dijele aplikaciju na grupe različite odgovornosti i razine abstrakcije. Layeri su standardizirani, znači uvijek se koriste sljedeći: app (sadrži routing, globalne stilove, providere itd. -&gt; ako npr. imamo file-based routing onda će ovdje ići rute), pages (tu se nalaze pagevi koji se importaju u rute iznad), widgeti (large self-contained chunks of functionality), features (poslovna logika -&gt; sve što donosi vrijednost korisniku), entities (poslovni entiteti specifični za aplikaciju) te shared - reusable funkcionalnosti (ili komponente) najčešće odvojeni od specifičnosti poslovne domene (ali ne nužno).</a:t>
+            </a:r>
+            <a:br/>
+            <a:br/>
+            <a:r>
+              <a:t>Temeljno pravilo FSD-a je da moduli iz jednog layera smiju znati, odnosno smiju importati samo module isključivo iz layera ispod. Na primjer, modul iz pagesa smije importati samo iz widgetsa i featuresa, ali ne smije iz app-a.</a:t>
+            </a:r>
+            <a:br/>
+            <a:br/>
           </a:p>
         </p:txBody>
       </p:sp>
@@ -1752,7 +1780,7 @@
       </p:grpSpPr>
       <p:sp>
         <p:nvSpPr>
-          <p:cNvPr id="416" name="Shape 416"/>
+          <p:cNvPr id="374" name="Shape 374"/>
           <p:cNvSpPr/>
           <p:nvPr>
             <p:ph type="sldImg"/>
@@ -1773,7 +1801,7 @@
       </p:sp>
       <p:sp>
         <p:nvSpPr>
-          <p:cNvPr id="417" name="Shape 417"/>
+          <p:cNvPr id="375" name="Shape 375"/>
           <p:cNvSpPr/>
           <p:nvPr>
             <p:ph type="body" sz="quarter" idx="1"/>
@@ -1790,7 +1818,7 @@
           <a:p>
             <a:pPr/>
             <a:r>
-              <a:t>Treće pravilo: svaki slice mora imati index.ts koji eksponira svoj javni API. To je jedino mjesto kroz koje vanjski kod smije importati. Direktno importanje iz internih datoteka, kao auth/ui/LoginForm, strogo je zabranjeno. Public API daje dva ključna benefita za AI: prvo, drastično štedi tokene - AI pročita 8 redova index.ts-a i zna kompletno sučelje slica, umjesto da učitava 400+ linija implementacije. Drugo, Public API je stabilan ugovor - AI može refaktorirati internu implementaciju slica bez straha da će razbiti ostatak projekta. Index.ts je za AI ono što je TypeScript interface za developera.</a:t>
+              <a:t>FSD se svodi na tri temeljna pravila: slojevi koji definiraju hijerarhiju odgovornosti, slices i segments koji odvajaju domenu od tehničke svrhe, te public API koji definira jasan ugovor između modula. U sljedeća tri slidea ćemo proći svako od njih i vidjeti kako konkretno pomaže AI alatu.</a:t>
             </a:r>
           </a:p>
         </p:txBody>
@@ -1822,7 +1850,7 @@
       </p:grpSpPr>
       <p:sp>
         <p:nvSpPr>
-          <p:cNvPr id="431" name="Shape 431"/>
+          <p:cNvPr id="402" name="Shape 402"/>
           <p:cNvSpPr/>
           <p:nvPr>
             <p:ph type="sldImg"/>
@@ -1843,7 +1871,217 @@
       </p:sp>
       <p:sp>
         <p:nvSpPr>
+          <p:cNvPr id="403" name="Shape 403"/>
+          <p:cNvSpPr/>
+          <p:nvPr>
+            <p:ph type="body" sz="quarter" idx="1"/>
+          </p:nvPr>
+        </p:nvSpPr>
+        <p:spPr>
+          <a:prstGeom prst="rect">
+            <a:avLst/>
+          </a:prstGeom>
+        </p:spPr>
+        <p:txBody>
+          <a:bodyPr/>
+          <a:lstStyle/>
+          <a:p>
+            <a:pPr/>
+            <a:r>
+              <a:t>Slojevi su prvo i najvažnije pravilo FSD-a. Šest slojeva, uvijek u istom redoslijedu: app, pages, widgets, features, entities, shared. Pravilo importa je jednosmjerno - viši sloj smije importati iz nižeg, ali nikad obrnuto. Cross-importi između slica istog sloja su zabranjeni. Konkretni benefit za AI: file tree postaje mapa odgovornosti, AI odmah zna gdje je što. Drugi benefit: jednosmjerni tok importa znači da AI ne ulazi u beskonačne lance ovisnosti. Sjetite se onog slidea gdje je Card.tsx imao 6 importa u 6 različitih smjerova - sa slojevima, svi importi vode samo prema dolje.</a:t>
+            </a:r>
+          </a:p>
+        </p:txBody>
+      </p:sp>
+    </p:spTree>
+  </p:cSld>
+  <p:clrMapOvr>
+    <a:masterClrMapping/>
+  </p:clrMapOvr>
+</p:notes>
+</file>
+
+<file path=ppt/notesSlides/notesSlide27.xml><?xml version="1.0" encoding="utf-8"?>
+<p:notes xmlns:a="http://schemas.openxmlformats.org/drawingml/2006/main" xmlns:r="http://schemas.openxmlformats.org/officeDocument/2006/relationships" xmlns:p="http://schemas.openxmlformats.org/presentationml/2006/main" xmlns:m="http://schemas.openxmlformats.org/officeDocument/2006/math" xmlns:a14="http://schemas.microsoft.com/office/drawing/2010/main" showMasterSp="1" showMasterPhAnim="1">
+  <p:cSld>
+    <p:spTree>
+      <p:nvGrpSpPr>
+        <p:cNvPr id="1" name=""/>
+        <p:cNvGrpSpPr/>
+        <p:nvPr/>
+      </p:nvGrpSpPr>
+      <p:grpSpPr>
+        <a:xfrm>
+          <a:off x="0" y="0"/>
+          <a:ext cx="0" cy="0"/>
+          <a:chOff x="0" y="0"/>
+          <a:chExt cx="0" cy="0"/>
+        </a:xfrm>
+      </p:grpSpPr>
+      <p:sp>
+        <p:nvSpPr>
+          <p:cNvPr id="419" name="Shape 419"/>
+          <p:cNvSpPr/>
+          <p:nvPr>
+            <p:ph type="sldImg"/>
+          </p:nvPr>
+        </p:nvSpPr>
+        <p:spPr>
+          <a:prstGeom prst="rect">
+            <a:avLst/>
+          </a:prstGeom>
+        </p:spPr>
+        <p:txBody>
+          <a:bodyPr/>
+          <a:lstStyle/>
+          <a:p>
+            <a:pPr/>
+          </a:p>
+        </p:txBody>
+      </p:sp>
+      <p:sp>
+        <p:nvSpPr>
+          <p:cNvPr id="420" name="Shape 420"/>
+          <p:cNvSpPr/>
+          <p:nvPr>
+            <p:ph type="body" sz="quarter" idx="1"/>
+          </p:nvPr>
+        </p:nvSpPr>
+        <p:spPr>
+          <a:prstGeom prst="rect">
+            <a:avLst/>
+          </a:prstGeom>
+        </p:spPr>
+        <p:txBody>
+          <a:bodyPr/>
+          <a:lstStyle/>
+          <a:p>
+            <a:pPr/>
+            <a:r>
+              <a:t>Drugo pravilo razdvaja što od kako. Slice predstavlja jednu poslovnu domenu - auth, profile-edit, like-post. Unutar slica imamo segmente koji grupiraju kod po tehničkoj svrsi - ui, model, api, lib. Kako ovo pomaže AI-u? Prvo, granice slica znače da AI ostaje unutar jedne domene dok radi, ne vuče u kontekst kod iz drugih featurea. Drugo, segmenti su isti u svakom slice-u - AI nauči obrazac jednom i može ga primijeniti svugdje. Domain-based naming, user.ts a ne types.ts, daje AI-u jak semantički signal i kod tekstualne pretrage i kod embeddinga.</a:t>
+            </a:r>
+          </a:p>
+        </p:txBody>
+      </p:sp>
+    </p:spTree>
+  </p:cSld>
+  <p:clrMapOvr>
+    <a:masterClrMapping/>
+  </p:clrMapOvr>
+</p:notes>
+</file>
+
+<file path=ppt/notesSlides/notesSlide28.xml><?xml version="1.0" encoding="utf-8"?>
+<p:notes xmlns:a="http://schemas.openxmlformats.org/drawingml/2006/main" xmlns:r="http://schemas.openxmlformats.org/officeDocument/2006/relationships" xmlns:p="http://schemas.openxmlformats.org/presentationml/2006/main" xmlns:m="http://schemas.openxmlformats.org/officeDocument/2006/math" xmlns:a14="http://schemas.microsoft.com/office/drawing/2010/main" showMasterSp="1" showMasterPhAnim="1">
+  <p:cSld>
+    <p:spTree>
+      <p:nvGrpSpPr>
+        <p:cNvPr id="1" name=""/>
+        <p:cNvGrpSpPr/>
+        <p:nvPr/>
+      </p:nvGrpSpPr>
+      <p:grpSpPr>
+        <a:xfrm>
+          <a:off x="0" y="0"/>
+          <a:ext cx="0" cy="0"/>
+          <a:chOff x="0" y="0"/>
+          <a:chExt cx="0" cy="0"/>
+        </a:xfrm>
+      </p:grpSpPr>
+      <p:sp>
+        <p:nvSpPr>
           <p:cNvPr id="432" name="Shape 432"/>
+          <p:cNvSpPr/>
+          <p:nvPr>
+            <p:ph type="sldImg"/>
+          </p:nvPr>
+        </p:nvSpPr>
+        <p:spPr>
+          <a:prstGeom prst="rect">
+            <a:avLst/>
+          </a:prstGeom>
+        </p:spPr>
+        <p:txBody>
+          <a:bodyPr/>
+          <a:lstStyle/>
+          <a:p>
+            <a:pPr/>
+          </a:p>
+        </p:txBody>
+      </p:sp>
+      <p:sp>
+        <p:nvSpPr>
+          <p:cNvPr id="433" name="Shape 433"/>
+          <p:cNvSpPr/>
+          <p:nvPr>
+            <p:ph type="body" sz="quarter" idx="1"/>
+          </p:nvPr>
+        </p:nvSpPr>
+        <p:spPr>
+          <a:prstGeom prst="rect">
+            <a:avLst/>
+          </a:prstGeom>
+        </p:spPr>
+        <p:txBody>
+          <a:bodyPr/>
+          <a:lstStyle/>
+          <a:p>
+            <a:pPr/>
+            <a:r>
+              <a:t>Treće pravilo: svaki slice mora imati index.ts koji eksponira svoj javni API. To je jedino mjesto kroz koje vanjski kod smije importati. Direktno importanje iz internih datoteka, kao auth/ui/LoginForm, strogo je zabranjeno. Public API daje dva ključna benefita za AI: prvo, drastično štedi tokene - AI pročita 8 redova index.ts-a i zna kompletno sučelje slica, umjesto da učitava 400+ linija implementacije. Drugo, Public API je stabilan ugovor - AI može refaktorirati internu implementaciju slica bez straha da će razbiti ostatak projekta. Index.ts je za AI ono što je TypeScript interface za developera.</a:t>
+            </a:r>
+          </a:p>
+        </p:txBody>
+      </p:sp>
+    </p:spTree>
+  </p:cSld>
+  <p:clrMapOvr>
+    <a:masterClrMapping/>
+  </p:clrMapOvr>
+</p:notes>
+</file>
+
+<file path=ppt/notesSlides/notesSlide29.xml><?xml version="1.0" encoding="utf-8"?>
+<p:notes xmlns:a="http://schemas.openxmlformats.org/drawingml/2006/main" xmlns:r="http://schemas.openxmlformats.org/officeDocument/2006/relationships" xmlns:p="http://schemas.openxmlformats.org/presentationml/2006/main" xmlns:m="http://schemas.openxmlformats.org/officeDocument/2006/math" xmlns:a14="http://schemas.microsoft.com/office/drawing/2010/main" showMasterSp="1" showMasterPhAnim="1">
+  <p:cSld>
+    <p:spTree>
+      <p:nvGrpSpPr>
+        <p:cNvPr id="1" name=""/>
+        <p:cNvGrpSpPr/>
+        <p:nvPr/>
+      </p:nvGrpSpPr>
+      <p:grpSpPr>
+        <a:xfrm>
+          <a:off x="0" y="0"/>
+          <a:ext cx="0" cy="0"/>
+          <a:chOff x="0" y="0"/>
+          <a:chExt cx="0" cy="0"/>
+        </a:xfrm>
+      </p:grpSpPr>
+      <p:sp>
+        <p:nvSpPr>
+          <p:cNvPr id="447" name="Shape 447"/>
+          <p:cNvSpPr/>
+          <p:nvPr>
+            <p:ph type="sldImg"/>
+          </p:nvPr>
+        </p:nvSpPr>
+        <p:spPr>
+          <a:prstGeom prst="rect">
+            <a:avLst/>
+          </a:prstGeom>
+        </p:spPr>
+        <p:txBody>
+          <a:bodyPr/>
+          <a:lstStyle/>
+          <a:p>
+            <a:pPr/>
+          </a:p>
+        </p:txBody>
+      </p:sp>
+      <p:sp>
+        <p:nvSpPr>
+          <p:cNvPr id="448" name="Shape 448"/>
           <p:cNvSpPr/>
           <p:nvPr>
             <p:ph type="body" sz="quarter" idx="1"/>
@@ -12557,57 +12795,6 @@
           </a:p>
         </p:txBody>
       </p:sp>
-      <p:sp>
-        <p:nvSpPr>
-          <p:cNvPr id="317" name="TextBox 6"/>
-          <p:cNvSpPr txBox="1"/>
-          <p:nvPr/>
-        </p:nvSpPr>
-        <p:spPr>
-          <a:xfrm>
-            <a:off x="640079" y="3657600"/>
-            <a:ext cx="10908794" cy="304800"/>
-          </a:xfrm>
-          <a:prstGeom prst="rect">
-            <a:avLst/>
-          </a:prstGeom>
-          <a:ln w="12700">
-            <a:miter lim="400000"/>
-          </a:ln>
-          <a:extLst>
-            <a:ext uri="{C572A759-6A51-4108-AA02-DFA0A04FC94B}">
-              <ma14:wrappingTextBoxFlag xmlns:ma14="http://schemas.microsoft.com/office/mac/drawingml/2011/main" val="1"/>
-            </a:ext>
-          </a:extLst>
-        </p:spPr>
-        <p:txBody>
-          <a:bodyPr lIns="0" tIns="0" rIns="0" bIns="0">
-            <a:spAutoFit/>
-          </a:bodyPr>
-          <a:lstStyle>
-            <a:lvl1pPr>
-              <a:lnSpc>
-                <a:spcPct val="150000"/>
-              </a:lnSpc>
-              <a:defRPr sz="2000">
-                <a:solidFill>
-                  <a:srgbClr val="F2F2F2"/>
-                </a:solidFill>
-                <a:latin typeface="Inter Regular"/>
-                <a:ea typeface="Inter Regular"/>
-                <a:cs typeface="Inter Regular"/>
-                <a:sym typeface="Inter Regular"/>
-              </a:defRPr>
-            </a:lvl1pPr>
-          </a:lstStyle>
-          <a:p>
-            <a:pPr/>
-            <a:r>
-              <a:t>Kako možemo izgraditi dobru arhitekturu?</a:t>
-            </a:r>
-          </a:p>
-        </p:txBody>
-      </p:sp>
     </p:spTree>
   </p:cSld>
   <p:clrMapOvr>
@@ -12636,7 +12823,7 @@
       </p:grpSpPr>
       <p:sp>
         <p:nvSpPr>
-          <p:cNvPr id="319" name="TextBox 1"/>
+          <p:cNvPr id="320" name="TextBox 1"/>
           <p:cNvSpPr txBox="1"/>
           <p:nvPr/>
         </p:nvSpPr>
@@ -12696,7 +12883,7 @@
       </p:sp>
       <p:sp>
         <p:nvSpPr>
-          <p:cNvPr id="320" name="Rectangle 2"/>
+          <p:cNvPr id="321" name="Rectangle 2"/>
           <p:cNvSpPr/>
           <p:nvPr/>
         </p:nvSpPr>
@@ -12731,7 +12918,7 @@
       </p:sp>
       <p:sp>
         <p:nvSpPr>
-          <p:cNvPr id="321" name="Rounded Rectangle 3"/>
+          <p:cNvPr id="322" name="Rounded Rectangle 3"/>
           <p:cNvSpPr/>
           <p:nvPr/>
         </p:nvSpPr>
@@ -12768,7 +12955,7 @@
       </p:sp>
       <p:sp>
         <p:nvSpPr>
-          <p:cNvPr id="322" name="Rectangle 4"/>
+          <p:cNvPr id="323" name="Rectangle 4"/>
           <p:cNvSpPr/>
           <p:nvPr/>
         </p:nvSpPr>
@@ -12803,7 +12990,7 @@
       </p:sp>
       <p:sp>
         <p:nvSpPr>
-          <p:cNvPr id="323" name="TextBox 5"/>
+          <p:cNvPr id="324" name="TextBox 5"/>
           <p:cNvSpPr txBox="1"/>
           <p:nvPr/>
         </p:nvSpPr>
@@ -12864,7 +13051,7 @@
       </p:sp>
       <p:sp>
         <p:nvSpPr>
-          <p:cNvPr id="324" name="TextBox 6"/>
+          <p:cNvPr id="325" name="TextBox 6"/>
           <p:cNvSpPr txBox="1"/>
           <p:nvPr/>
         </p:nvSpPr>
@@ -12908,7 +13095,7 @@
           <a:p>
             <a:pPr/>
             <a:r>
-              <a:t>Kako možemo izgraditi dobru arhitekturu? Primjenom prave metodologije.</a:t>
+              <a:t>Kako možemo izgraditi dobru arhitekturu?</a:t>
             </a:r>
           </a:p>
         </p:txBody>
@@ -12941,14 +13128,14 @@
       </p:grpSpPr>
       <p:sp>
         <p:nvSpPr>
-          <p:cNvPr id="326" name="TextBox 1"/>
+          <p:cNvPr id="329" name="TextBox 1"/>
           <p:cNvSpPr txBox="1"/>
           <p:nvPr/>
         </p:nvSpPr>
         <p:spPr>
           <a:xfrm>
-            <a:off x="635253" y="3086100"/>
-            <a:ext cx="10908794" cy="685800"/>
+            <a:off x="640079" y="502919"/>
+            <a:ext cx="10908794" cy="558801"/>
           </a:xfrm>
           <a:prstGeom prst="rect">
             <a:avLst/>
@@ -12966,12 +13153,13 @@
           <a:bodyPr lIns="0" tIns="0" rIns="0" bIns="0">
             <a:spAutoFit/>
           </a:bodyPr>
-          <a:lstStyle>
-            <a:lvl1pPr algn="ctr">
+          <a:lstStyle/>
+          <a:p>
+            <a:pPr>
               <a:lnSpc>
-                <a:spcPct val="120000"/>
+                <a:spcPct val="104999"/>
               </a:lnSpc>
-              <a:defRPr sz="4400">
+              <a:defRPr sz="3600">
                 <a:solidFill>
                   <a:srgbClr val="F2F2F2"/>
                 </a:solidFill>
@@ -12980,12 +13168,239 @@
                 <a:cs typeface="Inter Bold"/>
                 <a:sym typeface="Inter Bold"/>
               </a:defRPr>
+            </a:pPr>
+            <a:r>
+              <a:t>Architecture </a:t>
+            </a:r>
+            <a:r>
+              <a:rPr>
+                <a:solidFill>
+                  <a:srgbClr val="00D4FF"/>
+                </a:solidFill>
+              </a:rPr>
+              <a:t>=</a:t>
+            </a:r>
+            <a:r>
+              <a:t> Context Engineering</a:t>
+            </a:r>
+          </a:p>
+        </p:txBody>
+      </p:sp>
+      <p:sp>
+        <p:nvSpPr>
+          <p:cNvPr id="330" name="Rectangle 2"/>
+          <p:cNvSpPr/>
+          <p:nvPr/>
+        </p:nvSpPr>
+        <p:spPr>
+          <a:xfrm>
+            <a:off x="640080" y="1280160"/>
+            <a:ext cx="548641" cy="36578"/>
+          </a:xfrm>
+          <a:prstGeom prst="rect">
+            <a:avLst/>
+          </a:prstGeom>
+          <a:solidFill>
+            <a:srgbClr val="00D4FF"/>
+          </a:solidFill>
+          <a:ln w="12700">
+            <a:miter lim="400000"/>
+          </a:ln>
+        </p:spPr>
+        <p:txBody>
+          <a:bodyPr lIns="45718" tIns="45718" rIns="45718" bIns="45718" anchor="ctr"/>
+          <a:lstStyle/>
+          <a:p>
+            <a:pPr algn="ctr">
+              <a:defRPr>
+                <a:solidFill>
+                  <a:srgbClr val="FFFFFF"/>
+                </a:solidFill>
+              </a:defRPr>
+            </a:pPr>
+          </a:p>
+        </p:txBody>
+      </p:sp>
+      <p:sp>
+        <p:nvSpPr>
+          <p:cNvPr id="331" name="Rounded Rectangle 3"/>
+          <p:cNvSpPr/>
+          <p:nvPr/>
+        </p:nvSpPr>
+        <p:spPr>
+          <a:xfrm>
+            <a:off x="640080" y="2194560"/>
+            <a:ext cx="10972801" cy="1097282"/>
+          </a:xfrm>
+          <a:prstGeom prst="roundRect">
+            <a:avLst>
+              <a:gd name="adj" fmla="val 6000"/>
+            </a:avLst>
+          </a:prstGeom>
+          <a:solidFill>
+            <a:srgbClr val="0E3A47"/>
+          </a:solidFill>
+          <a:ln w="12700">
+            <a:miter lim="400000"/>
+          </a:ln>
+        </p:spPr>
+        <p:txBody>
+          <a:bodyPr lIns="45718" tIns="45718" rIns="45718" bIns="45718" anchor="ctr"/>
+          <a:lstStyle/>
+          <a:p>
+            <a:pPr algn="ctr">
+              <a:defRPr>
+                <a:solidFill>
+                  <a:srgbClr val="FFFFFF"/>
+                </a:solidFill>
+              </a:defRPr>
+            </a:pPr>
+          </a:p>
+        </p:txBody>
+      </p:sp>
+      <p:sp>
+        <p:nvSpPr>
+          <p:cNvPr id="332" name="Rectangle 4"/>
+          <p:cNvSpPr/>
+          <p:nvPr/>
+        </p:nvSpPr>
+        <p:spPr>
+          <a:xfrm>
+            <a:off x="640080" y="2194560"/>
+            <a:ext cx="54866" cy="1097282"/>
+          </a:xfrm>
+          <a:prstGeom prst="rect">
+            <a:avLst/>
+          </a:prstGeom>
+          <a:solidFill>
+            <a:srgbClr val="00D4FF"/>
+          </a:solidFill>
+          <a:ln w="12700">
+            <a:miter lim="400000"/>
+          </a:ln>
+        </p:spPr>
+        <p:txBody>
+          <a:bodyPr lIns="45718" tIns="45718" rIns="45718" bIns="45718" anchor="ctr"/>
+          <a:lstStyle/>
+          <a:p>
+            <a:pPr algn="ctr">
+              <a:defRPr>
+                <a:solidFill>
+                  <a:srgbClr val="FFFFFF"/>
+                </a:solidFill>
+              </a:defRPr>
+            </a:pPr>
+          </a:p>
+        </p:txBody>
+      </p:sp>
+      <p:sp>
+        <p:nvSpPr>
+          <p:cNvPr id="333" name="TextBox 5"/>
+          <p:cNvSpPr txBox="1"/>
+          <p:nvPr/>
+        </p:nvSpPr>
+        <p:spPr>
+          <a:xfrm>
+            <a:off x="868678" y="2420111"/>
+            <a:ext cx="10607044" cy="701041"/>
+          </a:xfrm>
+          <a:prstGeom prst="rect">
+            <a:avLst/>
+          </a:prstGeom>
+          <a:ln w="12700">
+            <a:miter lim="400000"/>
+          </a:ln>
+          <a:extLst>
+            <a:ext uri="{C572A759-6A51-4108-AA02-DFA0A04FC94B}">
+              <ma14:wrappingTextBoxFlag xmlns:ma14="http://schemas.microsoft.com/office/mac/drawingml/2011/main" val="1"/>
+            </a:ext>
+          </a:extLst>
+        </p:spPr>
+        <p:txBody>
+          <a:bodyPr lIns="0" tIns="0" rIns="0" bIns="0" anchor="ctr">
+            <a:spAutoFit/>
+          </a:bodyPr>
+          <a:lstStyle/>
+          <a:p>
+            <a:pPr>
+              <a:lnSpc>
+                <a:spcPct val="130000"/>
+              </a:lnSpc>
+              <a:defRPr sz="2000">
+                <a:solidFill>
+                  <a:srgbClr val="F2F2F2"/>
+                </a:solidFill>
+                <a:latin typeface="Inter Regular"/>
+                <a:ea typeface="Inter Regular"/>
+                <a:cs typeface="Inter Regular"/>
+                <a:sym typeface="Inter Regular"/>
+              </a:defRPr>
+            </a:pPr>
+            <a:r>
+              <a:rPr>
+                <a:solidFill>
+                  <a:srgbClr val="60D1FA"/>
+                </a:solidFill>
+                <a:latin typeface="Inter Bold"/>
+                <a:ea typeface="Inter Bold"/>
+                <a:cs typeface="Inter Bold"/>
+                <a:sym typeface="Inter Bold"/>
+              </a:rPr>
+              <a:t>Dobra arhitektura</a:t>
+            </a:r>
+            <a:r>
+              <a:t> smanjuje količinu konteksta potrebnog AI-u da ispravno obavi svoj posao.</a:t>
+            </a:r>
+          </a:p>
+        </p:txBody>
+      </p:sp>
+      <p:sp>
+        <p:nvSpPr>
+          <p:cNvPr id="334" name="TextBox 6"/>
+          <p:cNvSpPr txBox="1"/>
+          <p:nvPr/>
+        </p:nvSpPr>
+        <p:spPr>
+          <a:xfrm>
+            <a:off x="640079" y="3657600"/>
+            <a:ext cx="10908794" cy="304800"/>
+          </a:xfrm>
+          <a:prstGeom prst="rect">
+            <a:avLst/>
+          </a:prstGeom>
+          <a:ln w="12700">
+            <a:miter lim="400000"/>
+          </a:ln>
+          <a:extLst>
+            <a:ext uri="{C572A759-6A51-4108-AA02-DFA0A04FC94B}">
+              <ma14:wrappingTextBoxFlag xmlns:ma14="http://schemas.microsoft.com/office/mac/drawingml/2011/main" val="1"/>
+            </a:ext>
+          </a:extLst>
+        </p:spPr>
+        <p:txBody>
+          <a:bodyPr lIns="0" tIns="0" rIns="0" bIns="0">
+            <a:spAutoFit/>
+          </a:bodyPr>
+          <a:lstStyle>
+            <a:lvl1pPr>
+              <a:lnSpc>
+                <a:spcPct val="150000"/>
+              </a:lnSpc>
+              <a:defRPr sz="2000">
+                <a:solidFill>
+                  <a:srgbClr val="F2F2F2"/>
+                </a:solidFill>
+                <a:latin typeface="Inter Regular"/>
+                <a:ea typeface="Inter Regular"/>
+                <a:cs typeface="Inter Regular"/>
+                <a:sym typeface="Inter Regular"/>
+              </a:defRPr>
             </a:lvl1pPr>
           </a:lstStyle>
           <a:p>
             <a:pPr/>
             <a:r>
-              <a:t>Feature-Sliced Design</a:t>
+              <a:t>Kako možemo izgraditi dobru arhitekturu? Primjenom prave metodologije.</a:t>
             </a:r>
           </a:p>
         </p:txBody>
@@ -13018,14 +13433,14 @@
       </p:grpSpPr>
       <p:sp>
         <p:nvSpPr>
-          <p:cNvPr id="328" name="TextBox 1"/>
+          <p:cNvPr id="338" name="TextBox 1"/>
           <p:cNvSpPr txBox="1"/>
           <p:nvPr/>
         </p:nvSpPr>
         <p:spPr>
           <a:xfrm>
-            <a:off x="640079" y="502919"/>
-            <a:ext cx="10908794" cy="558801"/>
+            <a:off x="635253" y="3086100"/>
+            <a:ext cx="10908794" cy="685800"/>
           </a:xfrm>
           <a:prstGeom prst="rect">
             <a:avLst/>
@@ -13043,397 +13458,26 @@
           <a:bodyPr lIns="0" tIns="0" rIns="0" bIns="0">
             <a:spAutoFit/>
           </a:bodyPr>
-          <a:lstStyle/>
-          <a:p>
-            <a:pPr>
-              <a:defRPr sz="3600">
-                <a:solidFill>
-                  <a:srgbClr val="FFFFFF"/>
+          <a:lstStyle>
+            <a:lvl1pPr algn="ctr">
+              <a:lnSpc>
+                <a:spcPct val="120000"/>
+              </a:lnSpc>
+              <a:defRPr sz="4400">
+                <a:solidFill>
+                  <a:srgbClr val="F2F2F2"/>
                 </a:solidFill>
                 <a:latin typeface="Inter Bold"/>
                 <a:ea typeface="Inter Bold"/>
                 <a:cs typeface="Inter Bold"/>
                 <a:sym typeface="Inter Bold"/>
               </a:defRPr>
-            </a:pPr>
-            <a:r>
-              <a:t>Što je </a:t>
-            </a:r>
-            <a:r>
-              <a:rPr>
-                <a:solidFill>
-                  <a:srgbClr val="00D4FF"/>
-                </a:solidFill>
-              </a:rPr>
-              <a:t>Feature-Sliced Design</a:t>
-            </a:r>
-            <a:r>
-              <a:t>?</a:t>
-            </a:r>
-          </a:p>
-        </p:txBody>
-      </p:sp>
-      <p:sp>
-        <p:nvSpPr>
-          <p:cNvPr id="329" name="Rectangle 3"/>
-          <p:cNvSpPr/>
-          <p:nvPr/>
-        </p:nvSpPr>
-        <p:spPr>
-          <a:xfrm>
-            <a:off x="640080" y="1282700"/>
-            <a:ext cx="548641" cy="36577"/>
-          </a:xfrm>
-          <a:prstGeom prst="rect">
-            <a:avLst/>
-          </a:prstGeom>
-          <a:solidFill>
-            <a:srgbClr val="00D4FF"/>
-          </a:solidFill>
-          <a:ln w="12700">
-            <a:miter lim="400000"/>
-          </a:ln>
-        </p:spPr>
-        <p:txBody>
-          <a:bodyPr lIns="45718" tIns="45718" rIns="45718" bIns="45718" anchor="ctr"/>
-          <a:lstStyle/>
-          <a:p>
-            <a:pPr algn="ctr">
-              <a:defRPr>
-                <a:solidFill>
-                  <a:srgbClr val="FFFFFF"/>
-                </a:solidFill>
-              </a:defRPr>
-            </a:pPr>
-          </a:p>
-        </p:txBody>
-      </p:sp>
-      <p:sp>
-        <p:nvSpPr>
-          <p:cNvPr id="330" name="TextBox 4"/>
-          <p:cNvSpPr txBox="1"/>
-          <p:nvPr/>
-        </p:nvSpPr>
-        <p:spPr>
-          <a:xfrm>
-            <a:off x="635253" y="2340101"/>
-            <a:ext cx="10908794" cy="533401"/>
-          </a:xfrm>
-          <a:prstGeom prst="rect">
-            <a:avLst/>
-          </a:prstGeom>
-          <a:ln w="12700">
-            <a:miter lim="400000"/>
-          </a:ln>
-          <a:extLst>
-            <a:ext uri="{C572A759-6A51-4108-AA02-DFA0A04FC94B}">
-              <ma14:wrappingTextBoxFlag xmlns:ma14="http://schemas.microsoft.com/office/mac/drawingml/2011/main" val="1"/>
-            </a:ext>
-          </a:extLst>
-        </p:spPr>
-        <p:txBody>
-          <a:bodyPr lIns="0" tIns="0" rIns="0" bIns="0">
-            <a:spAutoFit/>
-          </a:bodyPr>
-          <a:lstStyle/>
-          <a:p>
-            <a:pPr>
-              <a:defRPr>
-                <a:solidFill>
-                  <a:srgbClr val="FFFFFF"/>
-                </a:solidFill>
-                <a:latin typeface="Inter Regular"/>
-                <a:ea typeface="Inter Regular"/>
-                <a:cs typeface="Inter Regular"/>
-                <a:sym typeface="Inter Regular"/>
-              </a:defRPr>
-            </a:pPr>
-            <a:r>
-              <a:t>FSD propisuje </a:t>
-            </a:r>
-            <a:r>
-              <a:rPr>
-                <a:solidFill>
-                  <a:srgbClr val="00D4FF"/>
-                </a:solidFill>
-                <a:latin typeface="Inter Bold"/>
-                <a:ea typeface="Inter Bold"/>
-                <a:cs typeface="Inter Bold"/>
-                <a:sym typeface="Inter Bold"/>
-              </a:rPr>
-              <a:t>kako organizirati kod</a:t>
-            </a:r>
-            <a:r>
-              <a:t> u projektu — gdje stavljati datoteke, kako ih grupirati i kako smiju ovisiti jedni o drugima.</a:t>
-            </a:r>
-          </a:p>
-        </p:txBody>
-      </p:sp>
-      <p:sp>
-        <p:nvSpPr>
-          <p:cNvPr id="331" name="TextBox 5"/>
-          <p:cNvSpPr txBox="1"/>
-          <p:nvPr/>
-        </p:nvSpPr>
-        <p:spPr>
-          <a:xfrm>
-            <a:off x="635253" y="3360928"/>
-            <a:ext cx="10908794" cy="266701"/>
-          </a:xfrm>
-          <a:prstGeom prst="rect">
-            <a:avLst/>
-          </a:prstGeom>
-          <a:ln w="12700">
-            <a:miter lim="400000"/>
-          </a:ln>
-          <a:extLst>
-            <a:ext uri="{C572A759-6A51-4108-AA02-DFA0A04FC94B}">
-              <ma14:wrappingTextBoxFlag xmlns:ma14="http://schemas.microsoft.com/office/mac/drawingml/2011/main" val="1"/>
-            </a:ext>
-          </a:extLst>
-        </p:spPr>
-        <p:txBody>
-          <a:bodyPr lIns="0" tIns="0" rIns="0" bIns="0">
-            <a:spAutoFit/>
-          </a:bodyPr>
-          <a:lstStyle/>
-          <a:p>
-            <a:pPr>
-              <a:defRPr>
-                <a:solidFill>
-                  <a:srgbClr val="FFFFFF"/>
-                </a:solidFill>
-                <a:latin typeface="Inter Regular"/>
-                <a:ea typeface="Inter Regular"/>
-                <a:cs typeface="Inter Regular"/>
-                <a:sym typeface="Inter Regular"/>
-              </a:defRPr>
-            </a:pPr>
-            <a:r>
-              <a:t>Cilj: kod koji je </a:t>
-            </a:r>
-            <a:r>
-              <a:rPr>
-                <a:solidFill>
-                  <a:srgbClr val="00D4FF"/>
-                </a:solidFill>
-                <a:latin typeface="Inter Bold"/>
-                <a:ea typeface="Inter Bold"/>
-                <a:cs typeface="Inter Bold"/>
-                <a:sym typeface="Inter Bold"/>
-              </a:rPr>
-              <a:t>predvidljiv</a:t>
-            </a:r>
-            <a:r>
-              <a:t>, </a:t>
-            </a:r>
-            <a:r>
-              <a:rPr>
-                <a:solidFill>
-                  <a:srgbClr val="00D4FF"/>
-                </a:solidFill>
-                <a:latin typeface="Inter Bold"/>
-                <a:ea typeface="Inter Bold"/>
-                <a:cs typeface="Inter Bold"/>
-                <a:sym typeface="Inter Bold"/>
-              </a:rPr>
-              <a:t>izoliran</a:t>
-            </a:r>
-            <a:r>
-              <a:t> i </a:t>
-            </a:r>
-            <a:r>
-              <a:rPr>
-                <a:solidFill>
-                  <a:srgbClr val="00D4FF"/>
-                </a:solidFill>
-                <a:latin typeface="Inter Bold"/>
-                <a:ea typeface="Inter Bold"/>
-                <a:cs typeface="Inter Bold"/>
-                <a:sym typeface="Inter Bold"/>
-              </a:rPr>
-              <a:t>razumljiv iz strukture</a:t>
-            </a:r>
-            <a:r>
-              <a:t> — bez čitanja svake datoteke.</a:t>
-            </a:r>
-          </a:p>
-        </p:txBody>
-      </p:sp>
-      <p:sp>
-        <p:nvSpPr>
-          <p:cNvPr id="332" name="Rounded Rectangle 6"/>
-          <p:cNvSpPr/>
-          <p:nvPr/>
-        </p:nvSpPr>
-        <p:spPr>
-          <a:xfrm>
-            <a:off x="640080" y="4389120"/>
-            <a:ext cx="10972801" cy="1645921"/>
-          </a:xfrm>
-          <a:prstGeom prst="roundRect">
-            <a:avLst>
-              <a:gd name="adj" fmla="val 8000"/>
-            </a:avLst>
-          </a:prstGeom>
-          <a:solidFill>
-            <a:srgbClr val="0E3A47"/>
-          </a:solidFill>
-          <a:ln w="12700">
-            <a:miter lim="400000"/>
-          </a:ln>
-        </p:spPr>
-        <p:txBody>
-          <a:bodyPr lIns="45718" tIns="45718" rIns="45718" bIns="45718" anchor="ctr"/>
-          <a:lstStyle/>
-          <a:p>
-            <a:pPr algn="ctr">
-              <a:defRPr>
-                <a:solidFill>
-                  <a:srgbClr val="FFFFFF"/>
-                </a:solidFill>
-              </a:defRPr>
-            </a:pPr>
-          </a:p>
-        </p:txBody>
-      </p:sp>
-      <p:sp>
-        <p:nvSpPr>
-          <p:cNvPr id="333" name="Rectangle 7"/>
-          <p:cNvSpPr/>
-          <p:nvPr/>
-        </p:nvSpPr>
-        <p:spPr>
-          <a:xfrm>
-            <a:off x="640080" y="4389120"/>
-            <a:ext cx="54865" cy="1645921"/>
-          </a:xfrm>
-          <a:prstGeom prst="rect">
-            <a:avLst/>
-          </a:prstGeom>
-          <a:solidFill>
-            <a:srgbClr val="00D4FF"/>
-          </a:solidFill>
-          <a:ln w="12700">
-            <a:miter lim="400000"/>
-          </a:ln>
-        </p:spPr>
-        <p:txBody>
-          <a:bodyPr lIns="45718" tIns="45718" rIns="45718" bIns="45718" anchor="ctr"/>
-          <a:lstStyle/>
-          <a:p>
-            <a:pPr algn="ctr">
-              <a:defRPr>
-                <a:solidFill>
-                  <a:srgbClr val="FFFFFF"/>
-                </a:solidFill>
-              </a:defRPr>
-            </a:pPr>
-          </a:p>
-        </p:txBody>
-      </p:sp>
-      <p:sp>
-        <p:nvSpPr>
-          <p:cNvPr id="334" name="TextBox 8"/>
-          <p:cNvSpPr txBox="1"/>
-          <p:nvPr/>
-        </p:nvSpPr>
-        <p:spPr>
-          <a:xfrm>
-            <a:off x="914400" y="4572000"/>
-            <a:ext cx="10515600" cy="533400"/>
-          </a:xfrm>
-          <a:prstGeom prst="rect">
-            <a:avLst/>
-          </a:prstGeom>
-          <a:ln w="12700">
-            <a:miter lim="400000"/>
-          </a:ln>
-          <a:extLst>
-            <a:ext uri="{C572A759-6A51-4108-AA02-DFA0A04FC94B}">
-              <ma14:wrappingTextBoxFlag xmlns:ma14="http://schemas.microsoft.com/office/mac/drawingml/2011/main" val="1"/>
-            </a:ext>
-          </a:extLst>
-        </p:spPr>
-        <p:txBody>
-          <a:bodyPr lIns="0" tIns="0" rIns="0" bIns="0">
-            <a:spAutoFit/>
-          </a:bodyPr>
-          <a:lstStyle/>
-          <a:p>
-            <a:pPr>
-              <a:defRPr>
-                <a:solidFill>
-                  <a:srgbClr val="FFFFFF"/>
-                </a:solidFill>
-                <a:latin typeface="Inter Regular"/>
-                <a:ea typeface="Inter Regular"/>
-                <a:cs typeface="Inter Regular"/>
-                <a:sym typeface="Inter Regular"/>
-              </a:defRPr>
-            </a:pPr>
-            <a:r>
-              <a:t>Drugim riječima — metodologija dizajnirana za isti problem koji AI ima: </a:t>
-            </a:r>
-            <a:r>
-              <a:rPr>
-                <a:solidFill>
-                  <a:srgbClr val="00D4FF"/>
-                </a:solidFill>
-                <a:latin typeface="Inter Bold"/>
-                <a:ea typeface="Inter Bold"/>
-                <a:cs typeface="Inter Bold"/>
-                <a:sym typeface="Inter Bold"/>
-              </a:rPr>
-              <a:t>izgraditi mentalni model projekta brzo i bez prethodnog konteksta.</a:t>
-            </a:r>
-          </a:p>
-        </p:txBody>
-      </p:sp>
-      <p:sp>
-        <p:nvSpPr>
-          <p:cNvPr id="335" name="TextBox 5"/>
-          <p:cNvSpPr txBox="1"/>
-          <p:nvPr/>
-        </p:nvSpPr>
-        <p:spPr>
-          <a:xfrm>
-            <a:off x="635253" y="1693060"/>
-            <a:ext cx="10908794" cy="266701"/>
-          </a:xfrm>
-          <a:prstGeom prst="rect">
-            <a:avLst/>
-          </a:prstGeom>
-          <a:ln w="12700">
-            <a:miter lim="400000"/>
-          </a:ln>
-          <a:extLst>
-            <a:ext uri="{C572A759-6A51-4108-AA02-DFA0A04FC94B}">
-              <ma14:wrappingTextBoxFlag xmlns:ma14="http://schemas.microsoft.com/office/mac/drawingml/2011/main" val="1"/>
-            </a:ext>
-          </a:extLst>
-        </p:spPr>
-        <p:txBody>
-          <a:bodyPr lIns="0" tIns="0" rIns="0" bIns="0">
-            <a:spAutoFit/>
-          </a:bodyPr>
-          <a:lstStyle>
-            <a:lvl1pPr>
-              <a:defRPr>
-                <a:solidFill>
-                  <a:srgbClr val="FFFFFF"/>
-                </a:solidFill>
-                <a:latin typeface="Inter Regular"/>
-                <a:ea typeface="Inter Regular"/>
-                <a:cs typeface="Inter Regular"/>
-                <a:sym typeface="Inter Regular"/>
-              </a:defRPr>
             </a:lvl1pPr>
           </a:lstStyle>
           <a:p>
             <a:pPr/>
             <a:r>
-              <a:t>Arhitekturna metodologija za frontend projekte</a:t>
+              <a:t>Feature-Sliced Design</a:t>
             </a:r>
           </a:p>
         </p:txBody>
@@ -13464,26 +13508,16 @@
           <a:chExt cx="0" cy="0"/>
         </a:xfrm>
       </p:grpSpPr>
-      <p:pic>
-        <p:nvPicPr>
-          <p:cNvPr id="339" name="FSD Diagram Dark.png" descr="FSD Diagram Dark.png"/>
-          <p:cNvPicPr>
-            <a:picLocks noChangeAspect="1"/>
-          </p:cNvPicPr>
-          <p:nvPr/>
-        </p:nvPicPr>
-        <p:blipFill>
-          <a:blip r:embed="rId3">
-            <a:extLst/>
-          </a:blip>
-          <a:stretch>
-            <a:fillRect/>
-          </a:stretch>
-        </p:blipFill>
-        <p:spPr>
-          <a:xfrm>
-            <a:off x="374649" y="0"/>
-            <a:ext cx="11430001" cy="6858001"/>
+      <p:sp>
+        <p:nvSpPr>
+          <p:cNvPr id="340" name="TextBox 1"/>
+          <p:cNvSpPr txBox="1"/>
+          <p:nvPr/>
+        </p:nvSpPr>
+        <p:spPr>
+          <a:xfrm>
+            <a:off x="640079" y="502919"/>
+            <a:ext cx="10908794" cy="558801"/>
           </a:xfrm>
           <a:prstGeom prst="rect">
             <a:avLst/>
@@ -13491,8 +13525,411 @@
           <a:ln w="12700">
             <a:miter lim="400000"/>
           </a:ln>
-        </p:spPr>
-      </p:pic>
+          <a:extLst>
+            <a:ext uri="{C572A759-6A51-4108-AA02-DFA0A04FC94B}">
+              <ma14:wrappingTextBoxFlag xmlns:ma14="http://schemas.microsoft.com/office/mac/drawingml/2011/main" val="1"/>
+            </a:ext>
+          </a:extLst>
+        </p:spPr>
+        <p:txBody>
+          <a:bodyPr lIns="0" tIns="0" rIns="0" bIns="0">
+            <a:spAutoFit/>
+          </a:bodyPr>
+          <a:lstStyle/>
+          <a:p>
+            <a:pPr>
+              <a:defRPr sz="3600">
+                <a:solidFill>
+                  <a:srgbClr val="FFFFFF"/>
+                </a:solidFill>
+                <a:latin typeface="Inter Bold"/>
+                <a:ea typeface="Inter Bold"/>
+                <a:cs typeface="Inter Bold"/>
+                <a:sym typeface="Inter Bold"/>
+              </a:defRPr>
+            </a:pPr>
+            <a:r>
+              <a:t>Što je </a:t>
+            </a:r>
+            <a:r>
+              <a:rPr>
+                <a:solidFill>
+                  <a:srgbClr val="00D4FF"/>
+                </a:solidFill>
+              </a:rPr>
+              <a:t>Feature-Sliced Design</a:t>
+            </a:r>
+            <a:r>
+              <a:t>?</a:t>
+            </a:r>
+          </a:p>
+        </p:txBody>
+      </p:sp>
+      <p:sp>
+        <p:nvSpPr>
+          <p:cNvPr id="341" name="Rectangle 3"/>
+          <p:cNvSpPr/>
+          <p:nvPr/>
+        </p:nvSpPr>
+        <p:spPr>
+          <a:xfrm>
+            <a:off x="640080" y="1282700"/>
+            <a:ext cx="548641" cy="36577"/>
+          </a:xfrm>
+          <a:prstGeom prst="rect">
+            <a:avLst/>
+          </a:prstGeom>
+          <a:solidFill>
+            <a:srgbClr val="00D4FF"/>
+          </a:solidFill>
+          <a:ln w="12700">
+            <a:miter lim="400000"/>
+          </a:ln>
+        </p:spPr>
+        <p:txBody>
+          <a:bodyPr lIns="45718" tIns="45718" rIns="45718" bIns="45718" anchor="ctr"/>
+          <a:lstStyle/>
+          <a:p>
+            <a:pPr algn="ctr">
+              <a:defRPr>
+                <a:solidFill>
+                  <a:srgbClr val="FFFFFF"/>
+                </a:solidFill>
+              </a:defRPr>
+            </a:pPr>
+          </a:p>
+        </p:txBody>
+      </p:sp>
+      <p:sp>
+        <p:nvSpPr>
+          <p:cNvPr id="342" name="TextBox 4"/>
+          <p:cNvSpPr txBox="1"/>
+          <p:nvPr/>
+        </p:nvSpPr>
+        <p:spPr>
+          <a:xfrm>
+            <a:off x="635253" y="2340101"/>
+            <a:ext cx="10908794" cy="533401"/>
+          </a:xfrm>
+          <a:prstGeom prst="rect">
+            <a:avLst/>
+          </a:prstGeom>
+          <a:ln w="12700">
+            <a:miter lim="400000"/>
+          </a:ln>
+          <a:extLst>
+            <a:ext uri="{C572A759-6A51-4108-AA02-DFA0A04FC94B}">
+              <ma14:wrappingTextBoxFlag xmlns:ma14="http://schemas.microsoft.com/office/mac/drawingml/2011/main" val="1"/>
+            </a:ext>
+          </a:extLst>
+        </p:spPr>
+        <p:txBody>
+          <a:bodyPr lIns="0" tIns="0" rIns="0" bIns="0">
+            <a:spAutoFit/>
+          </a:bodyPr>
+          <a:lstStyle/>
+          <a:p>
+            <a:pPr>
+              <a:defRPr>
+                <a:solidFill>
+                  <a:srgbClr val="FFFFFF"/>
+                </a:solidFill>
+                <a:latin typeface="Inter Regular"/>
+                <a:ea typeface="Inter Regular"/>
+                <a:cs typeface="Inter Regular"/>
+                <a:sym typeface="Inter Regular"/>
+              </a:defRPr>
+            </a:pPr>
+            <a:r>
+              <a:t>FSD propisuje </a:t>
+            </a:r>
+            <a:r>
+              <a:rPr>
+                <a:solidFill>
+                  <a:srgbClr val="00D4FF"/>
+                </a:solidFill>
+                <a:latin typeface="Inter Bold"/>
+                <a:ea typeface="Inter Bold"/>
+                <a:cs typeface="Inter Bold"/>
+                <a:sym typeface="Inter Bold"/>
+              </a:rPr>
+              <a:t>kako organizirati kod</a:t>
+            </a:r>
+            <a:r>
+              <a:t> u projektu - gdje stavljati datoteke, kako ih grupirati i kako smiju ovisiti jedni o drugima.</a:t>
+            </a:r>
+          </a:p>
+        </p:txBody>
+      </p:sp>
+      <p:sp>
+        <p:nvSpPr>
+          <p:cNvPr id="343" name="TextBox 5"/>
+          <p:cNvSpPr txBox="1"/>
+          <p:nvPr/>
+        </p:nvSpPr>
+        <p:spPr>
+          <a:xfrm>
+            <a:off x="635253" y="3360928"/>
+            <a:ext cx="10908794" cy="266701"/>
+          </a:xfrm>
+          <a:prstGeom prst="rect">
+            <a:avLst/>
+          </a:prstGeom>
+          <a:ln w="12700">
+            <a:miter lim="400000"/>
+          </a:ln>
+          <a:extLst>
+            <a:ext uri="{C572A759-6A51-4108-AA02-DFA0A04FC94B}">
+              <ma14:wrappingTextBoxFlag xmlns:ma14="http://schemas.microsoft.com/office/mac/drawingml/2011/main" val="1"/>
+            </a:ext>
+          </a:extLst>
+        </p:spPr>
+        <p:txBody>
+          <a:bodyPr lIns="0" tIns="0" rIns="0" bIns="0">
+            <a:spAutoFit/>
+          </a:bodyPr>
+          <a:lstStyle/>
+          <a:p>
+            <a:pPr>
+              <a:defRPr>
+                <a:solidFill>
+                  <a:srgbClr val="FFFFFF"/>
+                </a:solidFill>
+                <a:latin typeface="Inter Regular"/>
+                <a:ea typeface="Inter Regular"/>
+                <a:cs typeface="Inter Regular"/>
+                <a:sym typeface="Inter Regular"/>
+              </a:defRPr>
+            </a:pPr>
+            <a:r>
+              <a:t>Cilj: kod koji je </a:t>
+            </a:r>
+            <a:r>
+              <a:rPr>
+                <a:solidFill>
+                  <a:srgbClr val="00D4FF"/>
+                </a:solidFill>
+                <a:latin typeface="Inter Bold"/>
+                <a:ea typeface="Inter Bold"/>
+                <a:cs typeface="Inter Bold"/>
+                <a:sym typeface="Inter Bold"/>
+              </a:rPr>
+              <a:t>predvidljiv</a:t>
+            </a:r>
+            <a:r>
+              <a:t>, </a:t>
+            </a:r>
+            <a:r>
+              <a:rPr>
+                <a:solidFill>
+                  <a:srgbClr val="00D4FF"/>
+                </a:solidFill>
+                <a:latin typeface="Inter Bold"/>
+                <a:ea typeface="Inter Bold"/>
+                <a:cs typeface="Inter Bold"/>
+                <a:sym typeface="Inter Bold"/>
+              </a:rPr>
+              <a:t>izoliran</a:t>
+            </a:r>
+            <a:r>
+              <a:t> i </a:t>
+            </a:r>
+            <a:r>
+              <a:rPr>
+                <a:solidFill>
+                  <a:srgbClr val="00D4FF"/>
+                </a:solidFill>
+                <a:latin typeface="Inter Bold"/>
+                <a:ea typeface="Inter Bold"/>
+                <a:cs typeface="Inter Bold"/>
+                <a:sym typeface="Inter Bold"/>
+              </a:rPr>
+              <a:t>razumljiv iz strukture</a:t>
+            </a:r>
+            <a:r>
+              <a:t> - bez čitanja svake datoteke.</a:t>
+            </a:r>
+          </a:p>
+        </p:txBody>
+      </p:sp>
+      <p:sp>
+        <p:nvSpPr>
+          <p:cNvPr id="344" name="Rounded Rectangle 6"/>
+          <p:cNvSpPr/>
+          <p:nvPr/>
+        </p:nvSpPr>
+        <p:spPr>
+          <a:xfrm>
+            <a:off x="640080" y="4389120"/>
+            <a:ext cx="10972801" cy="1645921"/>
+          </a:xfrm>
+          <a:prstGeom prst="roundRect">
+            <a:avLst>
+              <a:gd name="adj" fmla="val 8000"/>
+            </a:avLst>
+          </a:prstGeom>
+          <a:solidFill>
+            <a:srgbClr val="0E3A47"/>
+          </a:solidFill>
+          <a:ln w="12700">
+            <a:miter lim="400000"/>
+          </a:ln>
+        </p:spPr>
+        <p:txBody>
+          <a:bodyPr lIns="45718" tIns="45718" rIns="45718" bIns="45718" anchor="ctr"/>
+          <a:lstStyle/>
+          <a:p>
+            <a:pPr algn="ctr">
+              <a:defRPr>
+                <a:solidFill>
+                  <a:srgbClr val="FFFFFF"/>
+                </a:solidFill>
+              </a:defRPr>
+            </a:pPr>
+          </a:p>
+        </p:txBody>
+      </p:sp>
+      <p:sp>
+        <p:nvSpPr>
+          <p:cNvPr id="345" name="Rectangle 7"/>
+          <p:cNvSpPr/>
+          <p:nvPr/>
+        </p:nvSpPr>
+        <p:spPr>
+          <a:xfrm>
+            <a:off x="640080" y="4389120"/>
+            <a:ext cx="54865" cy="1645921"/>
+          </a:xfrm>
+          <a:prstGeom prst="rect">
+            <a:avLst/>
+          </a:prstGeom>
+          <a:solidFill>
+            <a:srgbClr val="00D4FF"/>
+          </a:solidFill>
+          <a:ln w="12700">
+            <a:miter lim="400000"/>
+          </a:ln>
+        </p:spPr>
+        <p:txBody>
+          <a:bodyPr lIns="45718" tIns="45718" rIns="45718" bIns="45718" anchor="ctr"/>
+          <a:lstStyle/>
+          <a:p>
+            <a:pPr algn="ctr">
+              <a:defRPr>
+                <a:solidFill>
+                  <a:srgbClr val="FFFFFF"/>
+                </a:solidFill>
+              </a:defRPr>
+            </a:pPr>
+          </a:p>
+        </p:txBody>
+      </p:sp>
+      <p:sp>
+        <p:nvSpPr>
+          <p:cNvPr id="346" name="TextBox 8"/>
+          <p:cNvSpPr txBox="1"/>
+          <p:nvPr/>
+        </p:nvSpPr>
+        <p:spPr>
+          <a:xfrm>
+            <a:off x="914400" y="4572000"/>
+            <a:ext cx="10515600" cy="533400"/>
+          </a:xfrm>
+          <a:prstGeom prst="rect">
+            <a:avLst/>
+          </a:prstGeom>
+          <a:ln w="12700">
+            <a:miter lim="400000"/>
+          </a:ln>
+          <a:extLst>
+            <a:ext uri="{C572A759-6A51-4108-AA02-DFA0A04FC94B}">
+              <ma14:wrappingTextBoxFlag xmlns:ma14="http://schemas.microsoft.com/office/mac/drawingml/2011/main" val="1"/>
+            </a:ext>
+          </a:extLst>
+        </p:spPr>
+        <p:txBody>
+          <a:bodyPr lIns="0" tIns="0" rIns="0" bIns="0">
+            <a:spAutoFit/>
+          </a:bodyPr>
+          <a:lstStyle/>
+          <a:p>
+            <a:pPr>
+              <a:defRPr>
+                <a:solidFill>
+                  <a:srgbClr val="FFFFFF"/>
+                </a:solidFill>
+                <a:latin typeface="Inter Regular"/>
+                <a:ea typeface="Inter Regular"/>
+                <a:cs typeface="Inter Regular"/>
+                <a:sym typeface="Inter Regular"/>
+              </a:defRPr>
+            </a:pPr>
+            <a:r>
+              <a:t>Drugim riječima - metodologija dizajnirana za isti problem koji AI ima: </a:t>
+            </a:r>
+            <a:r>
+              <a:rPr>
+                <a:solidFill>
+                  <a:srgbClr val="00D4FF"/>
+                </a:solidFill>
+                <a:latin typeface="Inter Bold"/>
+                <a:ea typeface="Inter Bold"/>
+                <a:cs typeface="Inter Bold"/>
+                <a:sym typeface="Inter Bold"/>
+              </a:rPr>
+              <a:t>izgraditi mentalni model projekta brzo i bez prethodnog konteksta.</a:t>
+            </a:r>
+          </a:p>
+        </p:txBody>
+      </p:sp>
+      <p:sp>
+        <p:nvSpPr>
+          <p:cNvPr id="347" name="TextBox 5"/>
+          <p:cNvSpPr txBox="1"/>
+          <p:nvPr/>
+        </p:nvSpPr>
+        <p:spPr>
+          <a:xfrm>
+            <a:off x="635253" y="1693060"/>
+            <a:ext cx="10908794" cy="266701"/>
+          </a:xfrm>
+          <a:prstGeom prst="rect">
+            <a:avLst/>
+          </a:prstGeom>
+          <a:ln w="12700">
+            <a:miter lim="400000"/>
+          </a:ln>
+          <a:extLst>
+            <a:ext uri="{C572A759-6A51-4108-AA02-DFA0A04FC94B}">
+              <ma14:wrappingTextBoxFlag xmlns:ma14="http://schemas.microsoft.com/office/mac/drawingml/2011/main" val="1"/>
+            </a:ext>
+          </a:extLst>
+        </p:spPr>
+        <p:txBody>
+          <a:bodyPr lIns="0" tIns="0" rIns="0" bIns="0">
+            <a:spAutoFit/>
+          </a:bodyPr>
+          <a:lstStyle>
+            <a:lvl1pPr>
+              <a:defRPr>
+                <a:solidFill>
+                  <a:srgbClr val="FFFFFF"/>
+                </a:solidFill>
+                <a:latin typeface="Inter Regular"/>
+                <a:ea typeface="Inter Regular"/>
+                <a:cs typeface="Inter Regular"/>
+                <a:sym typeface="Inter Regular"/>
+              </a:defRPr>
+            </a:lvl1pPr>
+          </a:lstStyle>
+          <a:p>
+            <a:pPr/>
+            <a:r>
+              <a:t>Arhitekturna metodologija za frontend projekte</a:t>
+            </a:r>
+          </a:p>
+        </p:txBody>
+      </p:sp>
     </p:spTree>
   </p:cSld>
   <p:clrMapOvr>
@@ -13519,9 +13956,229 @@
           <a:chExt cx="0" cy="0"/>
         </a:xfrm>
       </p:grpSpPr>
-      <p:sp>
-        <p:nvSpPr>
-          <p:cNvPr id="343" name="TextBox 1"/>
+      <p:pic>
+        <p:nvPicPr>
+          <p:cNvPr id="351" name="FSD Diagram Dark - Layers.png" descr="FSD Diagram Dark - Layers.png"/>
+          <p:cNvPicPr>
+            <a:picLocks noChangeAspect="1"/>
+          </p:cNvPicPr>
+          <p:nvPr/>
+        </p:nvPicPr>
+        <p:blipFill>
+          <a:blip r:embed="rId3">
+            <a:extLst/>
+          </a:blip>
+          <a:stretch>
+            <a:fillRect/>
+          </a:stretch>
+        </p:blipFill>
+        <p:spPr>
+          <a:xfrm>
+            <a:off x="374649" y="0"/>
+            <a:ext cx="11430001" cy="6858001"/>
+          </a:xfrm>
+          <a:prstGeom prst="rect">
+            <a:avLst/>
+          </a:prstGeom>
+          <a:ln w="12700">
+            <a:miter lim="400000"/>
+          </a:ln>
+        </p:spPr>
+      </p:pic>
+    </p:spTree>
+  </p:cSld>
+  <p:clrMapOvr>
+    <a:masterClrMapping/>
+  </p:clrMapOvr>
+  <p:transition xmlns:p14="http://schemas.microsoft.com/office/powerpoint/2010/main" spd="med" advClick="1"/>
+</p:sld>
+</file>
+
+<file path=ppt/slides/slide28.xml><?xml version="1.0" encoding="utf-8"?>
+<p:sld xmlns:a="http://schemas.openxmlformats.org/drawingml/2006/main" xmlns:r="http://schemas.openxmlformats.org/officeDocument/2006/relationships" xmlns:p="http://schemas.openxmlformats.org/presentationml/2006/main" xmlns:m="http://schemas.openxmlformats.org/officeDocument/2006/math" xmlns:a14="http://schemas.microsoft.com/office/drawing/2010/main" showMasterSp="1" showMasterPhAnim="1">
+  <p:cSld>
+    <p:spTree>
+      <p:nvGrpSpPr>
+        <p:cNvPr id="1" name=""/>
+        <p:cNvGrpSpPr/>
+        <p:nvPr/>
+      </p:nvGrpSpPr>
+      <p:grpSpPr>
+        <a:xfrm>
+          <a:off x="0" y="0"/>
+          <a:ext cx="0" cy="0"/>
+          <a:chOff x="0" y="0"/>
+          <a:chExt cx="0" cy="0"/>
+        </a:xfrm>
+      </p:grpSpPr>
+      <p:pic>
+        <p:nvPicPr>
+          <p:cNvPr id="355" name="FSD Diagram Dark - Layers - Slices.png" descr="FSD Diagram Dark - Layers - Slices.png"/>
+          <p:cNvPicPr>
+            <a:picLocks noChangeAspect="1"/>
+          </p:cNvPicPr>
+          <p:nvPr/>
+        </p:nvPicPr>
+        <p:blipFill>
+          <a:blip r:embed="rId2">
+            <a:extLst/>
+          </a:blip>
+          <a:stretch>
+            <a:fillRect/>
+          </a:stretch>
+        </p:blipFill>
+        <p:spPr>
+          <a:xfrm>
+            <a:off x="374650" y="0"/>
+            <a:ext cx="11430001" cy="6858001"/>
+          </a:xfrm>
+          <a:prstGeom prst="rect">
+            <a:avLst/>
+          </a:prstGeom>
+          <a:ln w="12700">
+            <a:miter lim="400000"/>
+          </a:ln>
+        </p:spPr>
+      </p:pic>
+    </p:spTree>
+  </p:cSld>
+  <p:clrMapOvr>
+    <a:masterClrMapping/>
+  </p:clrMapOvr>
+  <p:transition xmlns:p14="http://schemas.microsoft.com/office/powerpoint/2010/main" spd="med" advClick="1"/>
+</p:sld>
+</file>
+
+<file path=ppt/slides/slide29.xml><?xml version="1.0" encoding="utf-8"?>
+<p:sld xmlns:a="http://schemas.openxmlformats.org/drawingml/2006/main" xmlns:r="http://schemas.openxmlformats.org/officeDocument/2006/relationships" xmlns:p="http://schemas.openxmlformats.org/presentationml/2006/main" xmlns:m="http://schemas.openxmlformats.org/officeDocument/2006/math" xmlns:a14="http://schemas.microsoft.com/office/drawing/2010/main" showMasterSp="1" showMasterPhAnim="1">
+  <p:cSld>
+    <p:spTree>
+      <p:nvGrpSpPr>
+        <p:cNvPr id="1" name=""/>
+        <p:cNvGrpSpPr/>
+        <p:nvPr/>
+      </p:nvGrpSpPr>
+      <p:grpSpPr>
+        <a:xfrm>
+          <a:off x="0" y="0"/>
+          <a:ext cx="0" cy="0"/>
+          <a:chOff x="0" y="0"/>
+          <a:chExt cx="0" cy="0"/>
+        </a:xfrm>
+      </p:grpSpPr>
+      <p:pic>
+        <p:nvPicPr>
+          <p:cNvPr id="357" name="FSD Diagram Dark.png" descr="FSD Diagram Dark.png"/>
+          <p:cNvPicPr>
+            <a:picLocks noChangeAspect="1"/>
+          </p:cNvPicPr>
+          <p:nvPr/>
+        </p:nvPicPr>
+        <p:blipFill>
+          <a:blip r:embed="rId2">
+            <a:extLst/>
+          </a:blip>
+          <a:stretch>
+            <a:fillRect/>
+          </a:stretch>
+        </p:blipFill>
+        <p:spPr>
+          <a:xfrm>
+            <a:off x="374650" y="0"/>
+            <a:ext cx="11430000" cy="6858001"/>
+          </a:xfrm>
+          <a:prstGeom prst="rect">
+            <a:avLst/>
+          </a:prstGeom>
+          <a:ln w="12700">
+            <a:miter lim="400000"/>
+          </a:ln>
+        </p:spPr>
+      </p:pic>
+    </p:spTree>
+  </p:cSld>
+  <p:clrMapOvr>
+    <a:masterClrMapping/>
+  </p:clrMapOvr>
+  <p:transition xmlns:p14="http://schemas.microsoft.com/office/powerpoint/2010/main" spd="med" advClick="1"/>
+</p:sld>
+</file>
+
+<file path=ppt/slides/slide3.xml><?xml version="1.0" encoding="utf-8"?>
+<p:sld xmlns:a="http://schemas.openxmlformats.org/drawingml/2006/main" xmlns:r="http://schemas.openxmlformats.org/officeDocument/2006/relationships" xmlns:p="http://schemas.openxmlformats.org/presentationml/2006/main" xmlns:m="http://schemas.openxmlformats.org/officeDocument/2006/math" xmlns:a14="http://schemas.microsoft.com/office/drawing/2010/main" showMasterSp="1" showMasterPhAnim="1">
+  <p:cSld>
+    <p:spTree>
+      <p:nvGrpSpPr>
+        <p:cNvPr id="1" name=""/>
+        <p:cNvGrpSpPr/>
+        <p:nvPr/>
+      </p:nvGrpSpPr>
+      <p:grpSpPr>
+        <a:xfrm>
+          <a:off x="0" y="0"/>
+          <a:ext cx="0" cy="0"/>
+          <a:chOff x="0" y="0"/>
+          <a:chExt cx="0" cy="0"/>
+        </a:xfrm>
+      </p:grpSpPr>
+      <p:pic>
+        <p:nvPicPr>
+          <p:cNvPr id="102" name="top.png" descr="top.png"/>
+          <p:cNvPicPr>
+            <a:picLocks noChangeAspect="1"/>
+          </p:cNvPicPr>
+          <p:nvPr/>
+        </p:nvPicPr>
+        <p:blipFill>
+          <a:blip r:embed="rId2">
+            <a:extLst/>
+          </a:blip>
+          <a:stretch>
+            <a:fillRect/>
+          </a:stretch>
+        </p:blipFill>
+        <p:spPr>
+          <a:xfrm>
+            <a:off x="2866010" y="0"/>
+            <a:ext cx="6447280" cy="6858001"/>
+          </a:xfrm>
+          <a:prstGeom prst="rect">
+            <a:avLst/>
+          </a:prstGeom>
+          <a:ln w="12700">
+            <a:miter lim="400000"/>
+          </a:ln>
+        </p:spPr>
+      </p:pic>
+    </p:spTree>
+  </p:cSld>
+  <p:clrMapOvr>
+    <a:masterClrMapping/>
+  </p:clrMapOvr>
+  <p:transition xmlns:p14="http://schemas.microsoft.com/office/powerpoint/2010/main" spd="med" advClick="1"/>
+</p:sld>
+</file>
+
+<file path=ppt/slides/slide30.xml><?xml version="1.0" encoding="utf-8"?>
+<p:sld xmlns:a="http://schemas.openxmlformats.org/drawingml/2006/main" xmlns:r="http://schemas.openxmlformats.org/officeDocument/2006/relationships" xmlns:p="http://schemas.openxmlformats.org/presentationml/2006/main" xmlns:m="http://schemas.openxmlformats.org/officeDocument/2006/math" xmlns:a14="http://schemas.microsoft.com/office/drawing/2010/main" showMasterSp="1" showMasterPhAnim="1">
+  <p:cSld>
+    <p:spTree>
+      <p:nvGrpSpPr>
+        <p:cNvPr id="1" name=""/>
+        <p:cNvGrpSpPr/>
+        <p:nvPr/>
+      </p:nvGrpSpPr>
+      <p:grpSpPr>
+        <a:xfrm>
+          <a:off x="0" y="0"/>
+          <a:ext cx="0" cy="0"/>
+          <a:chOff x="0" y="0"/>
+          <a:chExt cx="0" cy="0"/>
+        </a:xfrm>
+      </p:grpSpPr>
+      <p:sp>
+        <p:nvSpPr>
+          <p:cNvPr id="359" name="TextBox 1"/>
           <p:cNvSpPr txBox="1"/>
           <p:nvPr/>
         </p:nvSpPr>
@@ -13569,7 +14226,7 @@
       </p:sp>
       <p:sp>
         <p:nvSpPr>
-          <p:cNvPr id="344" name="TextBox 2"/>
+          <p:cNvPr id="360" name="TextBox 2"/>
           <p:cNvSpPr txBox="1"/>
           <p:nvPr/>
         </p:nvSpPr>
@@ -13617,7 +14274,7 @@
       </p:sp>
       <p:sp>
         <p:nvSpPr>
-          <p:cNvPr id="345" name="Rectangle 3"/>
+          <p:cNvPr id="361" name="Rectangle 3"/>
           <p:cNvSpPr/>
           <p:nvPr/>
         </p:nvSpPr>
@@ -13652,7 +14309,7 @@
       </p:sp>
       <p:grpSp>
         <p:nvGrpSpPr>
-          <p:cNvPr id="348" name="Rounded Rectangle 4"/>
+          <p:cNvPr id="364" name="Rounded Rectangle 4"/>
           <p:cNvGrpSpPr/>
           <p:nvPr/>
         </p:nvGrpSpPr>
@@ -13666,7 +14323,7 @@
         </p:grpSpPr>
         <p:sp>
           <p:nvSpPr>
-            <p:cNvPr id="346" name="Rounded Rectangle"/>
+            <p:cNvPr id="362" name="Rounded Rectangle"/>
             <p:cNvSpPr/>
             <p:nvPr/>
           </p:nvSpPr>
@@ -13710,7 +14367,7 @@
         </p:sp>
         <p:sp>
           <p:nvSpPr>
-            <p:cNvPr id="347" name="Layers…"/>
+            <p:cNvPr id="363" name="Layers…"/>
             <p:cNvSpPr txBox="1"/>
             <p:nvPr/>
           </p:nvSpPr>
@@ -13776,7 +14433,7 @@
       </p:grpSp>
       <p:sp>
         <p:nvSpPr>
-          <p:cNvPr id="349" name="TextBox 5"/>
+          <p:cNvPr id="365" name="TextBox 5"/>
           <p:cNvSpPr txBox="1"/>
           <p:nvPr/>
         </p:nvSpPr>
@@ -13824,7 +14481,7 @@
       </p:sp>
       <p:grpSp>
         <p:nvGrpSpPr>
-          <p:cNvPr id="352" name="Rounded Rectangle 6"/>
+          <p:cNvPr id="368" name="Rounded Rectangle 6"/>
           <p:cNvGrpSpPr/>
           <p:nvPr/>
         </p:nvGrpSpPr>
@@ -13838,7 +14495,7 @@
         </p:grpSpPr>
         <p:sp>
           <p:nvSpPr>
-            <p:cNvPr id="350" name="Rounded Rectangle"/>
+            <p:cNvPr id="366" name="Rounded Rectangle"/>
             <p:cNvSpPr/>
             <p:nvPr/>
           </p:nvSpPr>
@@ -13882,7 +14539,7 @@
         </p:sp>
         <p:sp>
           <p:nvSpPr>
-            <p:cNvPr id="351" name="Slices &amp; Segments…"/>
+            <p:cNvPr id="367" name="Slices &amp; Segments…"/>
             <p:cNvSpPr txBox="1"/>
             <p:nvPr/>
           </p:nvSpPr>
@@ -13948,7 +14605,7 @@
       </p:grpSp>
       <p:sp>
         <p:nvSpPr>
-          <p:cNvPr id="353" name="TextBox 7"/>
+          <p:cNvPr id="369" name="TextBox 7"/>
           <p:cNvSpPr txBox="1"/>
           <p:nvPr/>
         </p:nvSpPr>
@@ -13996,7 +14653,7 @@
       </p:sp>
       <p:grpSp>
         <p:nvGrpSpPr>
-          <p:cNvPr id="356" name="Rounded Rectangle 8"/>
+          <p:cNvPr id="372" name="Rounded Rectangle 8"/>
           <p:cNvGrpSpPr/>
           <p:nvPr/>
         </p:nvGrpSpPr>
@@ -14010,7 +14667,7 @@
         </p:grpSpPr>
         <p:sp>
           <p:nvSpPr>
-            <p:cNvPr id="354" name="Rounded Rectangle"/>
+            <p:cNvPr id="370" name="Rounded Rectangle"/>
             <p:cNvSpPr/>
             <p:nvPr/>
           </p:nvSpPr>
@@ -14054,7 +14711,7 @@
         </p:sp>
         <p:sp>
           <p:nvSpPr>
-            <p:cNvPr id="355" name="Public API…"/>
+            <p:cNvPr id="371" name="Public API…"/>
             <p:cNvSpPr txBox="1"/>
             <p:nvPr/>
           </p:nvSpPr>
@@ -14120,7 +14777,7 @@
       </p:grpSp>
       <p:sp>
         <p:nvSpPr>
-          <p:cNvPr id="357" name="TextBox 9"/>
+          <p:cNvPr id="373" name="TextBox 9"/>
           <p:cNvSpPr txBox="1"/>
           <p:nvPr/>
         </p:nvSpPr>
@@ -14188,7 +14845,7 @@
 </p:sld>
 </file>
 
-<file path=ppt/slides/slide28.xml><?xml version="1.0" encoding="utf-8"?>
+<file path=ppt/slides/slide31.xml><?xml version="1.0" encoding="utf-8"?>
 <p:sld xmlns:a="http://schemas.openxmlformats.org/drawingml/2006/main" xmlns:r="http://schemas.openxmlformats.org/officeDocument/2006/relationships" xmlns:p="http://schemas.openxmlformats.org/presentationml/2006/main" xmlns:m="http://schemas.openxmlformats.org/officeDocument/2006/math" xmlns:a14="http://schemas.microsoft.com/office/drawing/2010/main" showMasterSp="1" showMasterPhAnim="1">
   <p:cSld>
     <p:spTree>
@@ -14207,7 +14864,7 @@
       </p:grpSpPr>
       <p:sp>
         <p:nvSpPr>
-          <p:cNvPr id="361" name="TextBox 1"/>
+          <p:cNvPr id="377" name="TextBox 1"/>
           <p:cNvSpPr txBox="1"/>
           <p:nvPr/>
         </p:nvSpPr>
@@ -14261,7 +14918,7 @@
       </p:sp>
       <p:sp>
         <p:nvSpPr>
-          <p:cNvPr id="362" name="TextBox 2"/>
+          <p:cNvPr id="378" name="TextBox 2"/>
           <p:cNvSpPr txBox="1"/>
           <p:nvPr/>
         </p:nvSpPr>
@@ -14309,7 +14966,7 @@
       </p:sp>
       <p:sp>
         <p:nvSpPr>
-          <p:cNvPr id="363" name="Rectangle 3"/>
+          <p:cNvPr id="379" name="Rectangle 3"/>
           <p:cNvSpPr/>
           <p:nvPr/>
         </p:nvSpPr>
@@ -14344,7 +15001,7 @@
       </p:sp>
       <p:sp>
         <p:nvSpPr>
-          <p:cNvPr id="364" name="TextBox 6"/>
+          <p:cNvPr id="380" name="TextBox 6"/>
           <p:cNvSpPr txBox="1"/>
           <p:nvPr/>
         </p:nvSpPr>
@@ -14392,7 +15049,7 @@
       </p:sp>
       <p:sp>
         <p:nvSpPr>
-          <p:cNvPr id="365" name="TextBox 7"/>
+          <p:cNvPr id="381" name="TextBox 7"/>
           <p:cNvSpPr txBox="1"/>
           <p:nvPr/>
         </p:nvSpPr>
@@ -14487,7 +15144,7 @@
       </p:sp>
       <p:grpSp>
         <p:nvGrpSpPr>
-          <p:cNvPr id="368" name="Rounded Rectangle 8"/>
+          <p:cNvPr id="384" name="Rounded Rectangle 8"/>
           <p:cNvGrpSpPr/>
           <p:nvPr/>
         </p:nvGrpSpPr>
@@ -14501,7 +15158,7 @@
         </p:grpSpPr>
         <p:sp>
           <p:nvSpPr>
-            <p:cNvPr id="366" name="Rounded Rectangle"/>
+            <p:cNvPr id="382" name="Rounded Rectangle"/>
             <p:cNvSpPr/>
             <p:nvPr/>
           </p:nvSpPr>
@@ -14545,7 +15202,7 @@
         </p:sp>
         <p:sp>
           <p:nvSpPr>
-            <p:cNvPr id="367" name="app"/>
+            <p:cNvPr id="383" name="app"/>
             <p:cNvSpPr txBox="1"/>
             <p:nvPr/>
           </p:nvSpPr>
@@ -14597,7 +15254,7 @@
       </p:grpSp>
       <p:sp>
         <p:nvSpPr>
-          <p:cNvPr id="369" name="TextBox 9"/>
+          <p:cNvPr id="385" name="TextBox 9"/>
           <p:cNvSpPr txBox="1"/>
           <p:nvPr/>
         </p:nvSpPr>
@@ -14645,7 +15302,7 @@
       </p:sp>
       <p:grpSp>
         <p:nvGrpSpPr>
-          <p:cNvPr id="372" name="Rounded Rectangle 10"/>
+          <p:cNvPr id="388" name="Rounded Rectangle 10"/>
           <p:cNvGrpSpPr/>
           <p:nvPr/>
         </p:nvGrpSpPr>
@@ -14659,7 +15316,7 @@
         </p:grpSpPr>
         <p:sp>
           <p:nvSpPr>
-            <p:cNvPr id="370" name="Rounded Rectangle"/>
+            <p:cNvPr id="386" name="Rounded Rectangle"/>
             <p:cNvSpPr/>
             <p:nvPr/>
           </p:nvSpPr>
@@ -14703,7 +15360,7 @@
         </p:sp>
         <p:sp>
           <p:nvSpPr>
-            <p:cNvPr id="371" name="pages"/>
+            <p:cNvPr id="387" name="pages"/>
             <p:cNvSpPr txBox="1"/>
             <p:nvPr/>
           </p:nvSpPr>
@@ -14755,7 +15412,7 @@
       </p:grpSp>
       <p:sp>
         <p:nvSpPr>
-          <p:cNvPr id="373" name="TextBox 11"/>
+          <p:cNvPr id="389" name="TextBox 11"/>
           <p:cNvSpPr txBox="1"/>
           <p:nvPr/>
         </p:nvSpPr>
@@ -14803,7 +15460,7 @@
       </p:sp>
       <p:grpSp>
         <p:nvGrpSpPr>
-          <p:cNvPr id="376" name="Rounded Rectangle 12"/>
+          <p:cNvPr id="392" name="Rounded Rectangle 12"/>
           <p:cNvGrpSpPr/>
           <p:nvPr/>
         </p:nvGrpSpPr>
@@ -14817,7 +15474,7 @@
         </p:grpSpPr>
         <p:sp>
           <p:nvSpPr>
-            <p:cNvPr id="374" name="Rounded Rectangle"/>
+            <p:cNvPr id="390" name="Rounded Rectangle"/>
             <p:cNvSpPr/>
             <p:nvPr/>
           </p:nvSpPr>
@@ -14861,7 +15518,7 @@
         </p:sp>
         <p:sp>
           <p:nvSpPr>
-            <p:cNvPr id="375" name="..."/>
+            <p:cNvPr id="391" name="..."/>
             <p:cNvSpPr txBox="1"/>
             <p:nvPr/>
           </p:nvSpPr>
@@ -14913,7 +15570,7 @@
       </p:grpSp>
       <p:sp>
         <p:nvSpPr>
-          <p:cNvPr id="377" name="TextBox 13"/>
+          <p:cNvPr id="393" name="TextBox 13"/>
           <p:cNvSpPr txBox="1"/>
           <p:nvPr/>
         </p:nvSpPr>
@@ -14961,7 +15618,7 @@
       </p:sp>
       <p:grpSp>
         <p:nvGrpSpPr>
-          <p:cNvPr id="380" name="Rounded Rectangle 14"/>
+          <p:cNvPr id="396" name="Rounded Rectangle 14"/>
           <p:cNvGrpSpPr/>
           <p:nvPr/>
         </p:nvGrpSpPr>
@@ -14975,7 +15632,7 @@
         </p:grpSpPr>
         <p:sp>
           <p:nvSpPr>
-            <p:cNvPr id="378" name="Rounded Rectangle"/>
+            <p:cNvPr id="394" name="Rounded Rectangle"/>
             <p:cNvSpPr/>
             <p:nvPr/>
           </p:nvSpPr>
@@ -15019,7 +15676,7 @@
         </p:sp>
         <p:sp>
           <p:nvSpPr>
-            <p:cNvPr id="379" name="shared"/>
+            <p:cNvPr id="395" name="shared"/>
             <p:cNvSpPr txBox="1"/>
             <p:nvPr/>
           </p:nvSpPr>
@@ -15071,7 +15728,7 @@
       </p:grpSp>
       <p:sp>
         <p:nvSpPr>
-          <p:cNvPr id="381" name="TextBox 15"/>
+          <p:cNvPr id="397" name="TextBox 15"/>
           <p:cNvSpPr txBox="1"/>
           <p:nvPr/>
         </p:nvSpPr>
@@ -15119,7 +15776,7 @@
       </p:sp>
       <p:sp>
         <p:nvSpPr>
-          <p:cNvPr id="382" name="TextBox 16"/>
+          <p:cNvPr id="398" name="TextBox 16"/>
           <p:cNvSpPr txBox="1"/>
           <p:nvPr/>
         </p:nvSpPr>
@@ -15180,7 +15837,7 @@
       </p:sp>
       <p:sp>
         <p:nvSpPr>
-          <p:cNvPr id="383" name="TextBox 17"/>
+          <p:cNvPr id="399" name="TextBox 17"/>
           <p:cNvSpPr txBox="1"/>
           <p:nvPr/>
         </p:nvSpPr>
@@ -15228,7 +15885,7 @@
       </p:sp>
       <p:sp>
         <p:nvSpPr>
-          <p:cNvPr id="384" name="TextBox 18"/>
+          <p:cNvPr id="400" name="TextBox 18"/>
           <p:cNvSpPr txBox="1"/>
           <p:nvPr/>
         </p:nvSpPr>
@@ -15289,7 +15946,7 @@
       </p:sp>
       <p:pic>
         <p:nvPicPr>
-          <p:cNvPr id="385" name="Folders Graphic.png" descr="Folders Graphic.png"/>
+          <p:cNvPr id="401" name="Folders Graphic.png" descr="Folders Graphic.png"/>
           <p:cNvPicPr>
             <a:picLocks noChangeAspect="1"/>
           </p:cNvPicPr>
@@ -15325,7 +15982,7 @@
 </p:sld>
 </file>
 
-<file path=ppt/slides/slide29.xml><?xml version="1.0" encoding="utf-8"?>
+<file path=ppt/slides/slide32.xml><?xml version="1.0" encoding="utf-8"?>
 <p:sld xmlns:a="http://schemas.openxmlformats.org/drawingml/2006/main" xmlns:r="http://schemas.openxmlformats.org/officeDocument/2006/relationships" xmlns:p="http://schemas.openxmlformats.org/presentationml/2006/main" xmlns:m="http://schemas.openxmlformats.org/officeDocument/2006/math" xmlns:a14="http://schemas.microsoft.com/office/drawing/2010/main" showMasterSp="1" showMasterPhAnim="1">
   <p:cSld>
     <p:spTree>
@@ -15344,7 +16001,7 @@
       </p:grpSpPr>
       <p:sp>
         <p:nvSpPr>
-          <p:cNvPr id="389" name="TextBox 1"/>
+          <p:cNvPr id="405" name="TextBox 1"/>
           <p:cNvSpPr txBox="1"/>
           <p:nvPr/>
         </p:nvSpPr>
@@ -15398,7 +16055,7 @@
       </p:sp>
       <p:sp>
         <p:nvSpPr>
-          <p:cNvPr id="390" name="TextBox 2"/>
+          <p:cNvPr id="406" name="TextBox 2"/>
           <p:cNvSpPr txBox="1"/>
           <p:nvPr/>
         </p:nvSpPr>
@@ -15446,7 +16103,7 @@
       </p:sp>
       <p:sp>
         <p:nvSpPr>
-          <p:cNvPr id="391" name="Rectangle 3"/>
+          <p:cNvPr id="407" name="Rectangle 3"/>
           <p:cNvSpPr/>
           <p:nvPr/>
         </p:nvSpPr>
@@ -15481,7 +16138,7 @@
       </p:sp>
       <p:sp>
         <p:nvSpPr>
-          <p:cNvPr id="392" name="TextBox 4"/>
+          <p:cNvPr id="408" name="TextBox 4"/>
           <p:cNvSpPr txBox="1"/>
           <p:nvPr/>
         </p:nvSpPr>
@@ -15529,7 +16186,7 @@
       </p:sp>
       <p:sp>
         <p:nvSpPr>
-          <p:cNvPr id="393" name="Rectangle 5"/>
+          <p:cNvPr id="409" name="Rectangle 5"/>
           <p:cNvSpPr/>
           <p:nvPr/>
         </p:nvSpPr>
@@ -15564,7 +16221,7 @@
       </p:sp>
       <p:sp>
         <p:nvSpPr>
-          <p:cNvPr id="394" name="TextBox 6"/>
+          <p:cNvPr id="410" name="TextBox 6"/>
           <p:cNvSpPr txBox="1"/>
           <p:nvPr/>
         </p:nvSpPr>
@@ -15737,7 +16394,7 @@
       </p:sp>
       <p:sp>
         <p:nvSpPr>
-          <p:cNvPr id="395" name="TextBox 7"/>
+          <p:cNvPr id="411" name="TextBox 7"/>
           <p:cNvSpPr txBox="1"/>
           <p:nvPr/>
         </p:nvSpPr>
@@ -15798,7 +16455,7 @@
       </p:sp>
       <p:sp>
         <p:nvSpPr>
-          <p:cNvPr id="396" name="TextBox 8"/>
+          <p:cNvPr id="412" name="TextBox 8"/>
           <p:cNvSpPr txBox="1"/>
           <p:nvPr/>
         </p:nvSpPr>
@@ -15846,7 +16503,7 @@
       </p:sp>
       <p:sp>
         <p:nvSpPr>
-          <p:cNvPr id="397" name="Rectangle 9"/>
+          <p:cNvPr id="413" name="Rectangle 9"/>
           <p:cNvSpPr/>
           <p:nvPr/>
         </p:nvSpPr>
@@ -15881,7 +16538,7 @@
       </p:sp>
       <p:sp>
         <p:nvSpPr>
-          <p:cNvPr id="398" name="TextBox 10"/>
+          <p:cNvPr id="414" name="TextBox 10"/>
           <p:cNvSpPr txBox="1"/>
           <p:nvPr/>
         </p:nvSpPr>
@@ -16097,7 +16754,7 @@
       </p:sp>
       <p:sp>
         <p:nvSpPr>
-          <p:cNvPr id="399" name="TextBox 11"/>
+          <p:cNvPr id="415" name="TextBox 11"/>
           <p:cNvSpPr txBox="1"/>
           <p:nvPr/>
         </p:nvSpPr>
@@ -16158,7 +16815,7 @@
       </p:sp>
       <p:sp>
         <p:nvSpPr>
-          <p:cNvPr id="400" name="Rounded Rectangle 12"/>
+          <p:cNvPr id="416" name="Rounded Rectangle 12"/>
           <p:cNvSpPr/>
           <p:nvPr/>
         </p:nvSpPr>
@@ -16195,7 +16852,7 @@
       </p:sp>
       <p:sp>
         <p:nvSpPr>
-          <p:cNvPr id="401" name="Rectangle 13"/>
+          <p:cNvPr id="417" name="Rectangle 13"/>
           <p:cNvSpPr/>
           <p:nvPr/>
         </p:nvSpPr>
@@ -16230,7 +16887,7 @@
       </p:sp>
       <p:sp>
         <p:nvSpPr>
-          <p:cNvPr id="402" name="TextBox 14"/>
+          <p:cNvPr id="418" name="TextBox 14"/>
           <p:cNvSpPr txBox="1"/>
           <p:nvPr/>
         </p:nvSpPr>
@@ -16298,7 +16955,7 @@
 </p:sld>
 </file>
 
-<file path=ppt/slides/slide3.xml><?xml version="1.0" encoding="utf-8"?>
+<file path=ppt/slides/slide33.xml><?xml version="1.0" encoding="utf-8"?>
 <p:sld xmlns:a="http://schemas.openxmlformats.org/drawingml/2006/main" xmlns:r="http://schemas.openxmlformats.org/officeDocument/2006/relationships" xmlns:p="http://schemas.openxmlformats.org/presentationml/2006/main" xmlns:m="http://schemas.openxmlformats.org/officeDocument/2006/math" xmlns:a14="http://schemas.microsoft.com/office/drawing/2010/main" showMasterSp="1" showMasterPhAnim="1">
   <p:cSld>
     <p:spTree>
@@ -16315,26 +16972,16 @@
           <a:chExt cx="0" cy="0"/>
         </a:xfrm>
       </p:grpSpPr>
-      <p:pic>
-        <p:nvPicPr>
-          <p:cNvPr id="102" name="top.png" descr="top.png"/>
-          <p:cNvPicPr>
-            <a:picLocks noChangeAspect="1"/>
-          </p:cNvPicPr>
-          <p:nvPr/>
-        </p:nvPicPr>
-        <p:blipFill>
-          <a:blip r:embed="rId2">
-            <a:extLst/>
-          </a:blip>
-          <a:stretch>
-            <a:fillRect/>
-          </a:stretch>
-        </p:blipFill>
-        <p:spPr>
-          <a:xfrm>
-            <a:off x="2866010" y="0"/>
-            <a:ext cx="6447280" cy="6858001"/>
+      <p:sp>
+        <p:nvSpPr>
+          <p:cNvPr id="422" name="TextBox 1"/>
+          <p:cNvSpPr txBox="1"/>
+          <p:nvPr/>
+        </p:nvSpPr>
+        <p:spPr>
+          <a:xfrm>
+            <a:off x="640079" y="502919"/>
+            <a:ext cx="10908794" cy="558801"/>
           </a:xfrm>
           <a:prstGeom prst="rect">
             <a:avLst/>
@@ -16342,8 +16989,801 @@
           <a:ln w="12700">
             <a:miter lim="400000"/>
           </a:ln>
-        </p:spPr>
-      </p:pic>
+          <a:extLst>
+            <a:ext uri="{C572A759-6A51-4108-AA02-DFA0A04FC94B}">
+              <ma14:wrappingTextBoxFlag xmlns:ma14="http://schemas.microsoft.com/office/mac/drawingml/2011/main" val="1"/>
+            </a:ext>
+          </a:extLst>
+        </p:spPr>
+        <p:txBody>
+          <a:bodyPr lIns="0" tIns="0" rIns="0" bIns="0">
+            <a:spAutoFit/>
+          </a:bodyPr>
+          <a:lstStyle/>
+          <a:p>
+            <a:pPr>
+              <a:defRPr sz="3600">
+                <a:solidFill>
+                  <a:srgbClr val="FFFFFF"/>
+                </a:solidFill>
+                <a:latin typeface="Inter Bold"/>
+                <a:ea typeface="Inter Bold"/>
+                <a:cs typeface="Inter Bold"/>
+                <a:sym typeface="Inter Bold"/>
+              </a:defRPr>
+            </a:pPr>
+            <a:r>
+              <a:t>Pravilo #3: </a:t>
+            </a:r>
+            <a:r>
+              <a:rPr>
+                <a:solidFill>
+                  <a:srgbClr val="00D4FF"/>
+                </a:solidFill>
+              </a:rPr>
+              <a:t>Public API</a:t>
+            </a:r>
+          </a:p>
+        </p:txBody>
+      </p:sp>
+      <p:sp>
+        <p:nvSpPr>
+          <p:cNvPr id="423" name="TextBox 2"/>
+          <p:cNvSpPr txBox="1"/>
+          <p:nvPr/>
+        </p:nvSpPr>
+        <p:spPr>
+          <a:xfrm>
+            <a:off x="640079" y="1371600"/>
+            <a:ext cx="10908794" cy="228600"/>
+          </a:xfrm>
+          <a:prstGeom prst="rect">
+            <a:avLst/>
+          </a:prstGeom>
+          <a:ln w="12700">
+            <a:miter lim="400000"/>
+          </a:ln>
+          <a:extLst>
+            <a:ext uri="{C572A759-6A51-4108-AA02-DFA0A04FC94B}">
+              <ma14:wrappingTextBoxFlag xmlns:ma14="http://schemas.microsoft.com/office/mac/drawingml/2011/main" val="1"/>
+            </a:ext>
+          </a:extLst>
+        </p:spPr>
+        <p:txBody>
+          <a:bodyPr lIns="0" tIns="0" rIns="0" bIns="0">
+            <a:spAutoFit/>
+          </a:bodyPr>
+          <a:lstStyle/>
+          <a:p>
+            <a:pPr>
+              <a:defRPr sz="1400">
+                <a:solidFill>
+                  <a:srgbClr val="888888"/>
+                </a:solidFill>
+                <a:latin typeface="Inter Regular"/>
+                <a:ea typeface="Inter Regular"/>
+                <a:cs typeface="Inter Regular"/>
+                <a:sym typeface="Inter Regular"/>
+              </a:defRPr>
+            </a:pPr>
+            <a:r>
+              <a:t>Svaki slice eksponira </a:t>
+            </a:r>
+            <a:r>
+              <a:rPr>
+                <a:solidFill>
+                  <a:srgbClr val="00D4FF"/>
+                </a:solidFill>
+                <a:latin typeface="JetBrains Mono Regular"/>
+                <a:ea typeface="JetBrains Mono Regular"/>
+                <a:cs typeface="JetBrains Mono Regular"/>
+                <a:sym typeface="JetBrains Mono Regular"/>
+              </a:rPr>
+              <a:t>index.ts</a:t>
+            </a:r>
+            <a:r>
+              <a:t> kao ugovor</a:t>
+            </a:r>
+          </a:p>
+        </p:txBody>
+      </p:sp>
+      <p:sp>
+        <p:nvSpPr>
+          <p:cNvPr id="424" name="Rectangle 3"/>
+          <p:cNvSpPr/>
+          <p:nvPr/>
+        </p:nvSpPr>
+        <p:spPr>
+          <a:xfrm>
+            <a:off x="640080" y="1691639"/>
+            <a:ext cx="548641" cy="36577"/>
+          </a:xfrm>
+          <a:prstGeom prst="rect">
+            <a:avLst/>
+          </a:prstGeom>
+          <a:solidFill>
+            <a:srgbClr val="00D4FF"/>
+          </a:solidFill>
+          <a:ln w="12700">
+            <a:miter lim="400000"/>
+          </a:ln>
+        </p:spPr>
+        <p:txBody>
+          <a:bodyPr lIns="45718" tIns="45718" rIns="45718" bIns="45718" anchor="ctr"/>
+          <a:lstStyle/>
+          <a:p>
+            <a:pPr algn="ctr">
+              <a:defRPr>
+                <a:solidFill>
+                  <a:srgbClr val="FFFFFF"/>
+                </a:solidFill>
+              </a:defRPr>
+            </a:pPr>
+          </a:p>
+        </p:txBody>
+      </p:sp>
+      <p:sp>
+        <p:nvSpPr>
+          <p:cNvPr id="425" name="Rectangle 4"/>
+          <p:cNvSpPr/>
+          <p:nvPr/>
+        </p:nvSpPr>
+        <p:spPr>
+          <a:xfrm>
+            <a:off x="640079" y="2194560"/>
+            <a:ext cx="5303522" cy="3017521"/>
+          </a:xfrm>
+          <a:prstGeom prst="rect">
+            <a:avLst/>
+          </a:prstGeom>
+          <a:solidFill>
+            <a:srgbClr val="1A1A2E"/>
+          </a:solidFill>
+          <a:ln w="12700">
+            <a:miter lim="400000"/>
+          </a:ln>
+        </p:spPr>
+        <p:txBody>
+          <a:bodyPr lIns="45718" tIns="45718" rIns="45718" bIns="45718" anchor="ctr"/>
+          <a:lstStyle/>
+          <a:p>
+            <a:pPr algn="ctr">
+              <a:defRPr>
+                <a:solidFill>
+                  <a:srgbClr val="FFFFFF"/>
+                </a:solidFill>
+              </a:defRPr>
+            </a:pPr>
+          </a:p>
+        </p:txBody>
+      </p:sp>
+      <p:sp>
+        <p:nvSpPr>
+          <p:cNvPr id="426" name="TextBox 5"/>
+          <p:cNvSpPr txBox="1"/>
+          <p:nvPr/>
+        </p:nvSpPr>
+        <p:spPr>
+          <a:xfrm>
+            <a:off x="822958" y="2359152"/>
+            <a:ext cx="2390141" cy="1833881"/>
+          </a:xfrm>
+          <a:prstGeom prst="rect">
+            <a:avLst/>
+          </a:prstGeom>
+          <a:ln w="12700">
+            <a:miter lim="400000"/>
+          </a:ln>
+          <a:extLst>
+            <a:ext uri="{C572A759-6A51-4108-AA02-DFA0A04FC94B}">
+              <ma14:wrappingTextBoxFlag xmlns:ma14="http://schemas.microsoft.com/office/mac/drawingml/2011/main" val="1"/>
+            </a:ext>
+          </a:extLst>
+        </p:spPr>
+        <p:txBody>
+          <a:bodyPr wrap="none" lIns="0" tIns="0" rIns="0" bIns="0">
+            <a:spAutoFit/>
+          </a:bodyPr>
+          <a:lstStyle/>
+          <a:p>
+            <a:pPr>
+              <a:lnSpc>
+                <a:spcPts val="1600"/>
+              </a:lnSpc>
+              <a:defRPr sz="1200">
+                <a:solidFill>
+                  <a:srgbClr val="F2F2F2"/>
+                </a:solidFill>
+                <a:latin typeface="JetBrains Mono Regular"/>
+                <a:ea typeface="JetBrains Mono Regular"/>
+                <a:cs typeface="JetBrains Mono Regular"/>
+                <a:sym typeface="JetBrains Mono Regular"/>
+              </a:defRPr>
+            </a:pPr>
+            <a:r>
+              <a:t>features/auth/</a:t>
+            </a:r>
+          </a:p>
+          <a:p>
+            <a:pPr>
+              <a:lnSpc>
+                <a:spcPts val="1600"/>
+              </a:lnSpc>
+              <a:defRPr sz="1200">
+                <a:solidFill>
+                  <a:srgbClr val="F2F2F2"/>
+                </a:solidFill>
+                <a:latin typeface="JetBrains Mono Regular"/>
+                <a:ea typeface="JetBrains Mono Regular"/>
+                <a:cs typeface="JetBrains Mono Regular"/>
+                <a:sym typeface="JetBrains Mono Regular"/>
+              </a:defRPr>
+            </a:pPr>
+            <a:r>
+              <a:t>  ui/</a:t>
+            </a:r>
+          </a:p>
+          <a:p>
+            <a:pPr>
+              <a:lnSpc>
+                <a:spcPts val="1600"/>
+              </a:lnSpc>
+              <a:defRPr sz="1200">
+                <a:solidFill>
+                  <a:srgbClr val="F2F2F2"/>
+                </a:solidFill>
+                <a:latin typeface="JetBrains Mono Regular"/>
+                <a:ea typeface="JetBrains Mono Regular"/>
+                <a:cs typeface="JetBrains Mono Regular"/>
+                <a:sym typeface="JetBrains Mono Regular"/>
+              </a:defRPr>
+            </a:pPr>
+            <a:r>
+              <a:t>    LoginForm.tsx</a:t>
+            </a:r>
+          </a:p>
+          <a:p>
+            <a:pPr>
+              <a:lnSpc>
+                <a:spcPts val="1600"/>
+              </a:lnSpc>
+              <a:defRPr sz="1200">
+                <a:solidFill>
+                  <a:srgbClr val="F2F2F2"/>
+                </a:solidFill>
+                <a:latin typeface="JetBrains Mono Regular"/>
+                <a:ea typeface="JetBrains Mono Regular"/>
+                <a:cs typeface="JetBrains Mono Regular"/>
+                <a:sym typeface="JetBrains Mono Regular"/>
+              </a:defRPr>
+            </a:pPr>
+            <a:r>
+              <a:t>    LogoutButton.tsx</a:t>
+            </a:r>
+          </a:p>
+          <a:p>
+            <a:pPr>
+              <a:lnSpc>
+                <a:spcPts val="1600"/>
+              </a:lnSpc>
+              <a:defRPr sz="1200">
+                <a:solidFill>
+                  <a:srgbClr val="F2F2F2"/>
+                </a:solidFill>
+                <a:latin typeface="JetBrains Mono Regular"/>
+                <a:ea typeface="JetBrains Mono Regular"/>
+                <a:cs typeface="JetBrains Mono Regular"/>
+                <a:sym typeface="JetBrains Mono Regular"/>
+              </a:defRPr>
+            </a:pPr>
+            <a:r>
+              <a:t>  model/</a:t>
+            </a:r>
+          </a:p>
+          <a:p>
+            <a:pPr>
+              <a:lnSpc>
+                <a:spcPts val="1600"/>
+              </a:lnSpc>
+              <a:defRPr sz="1200">
+                <a:solidFill>
+                  <a:srgbClr val="F2F2F2"/>
+                </a:solidFill>
+                <a:latin typeface="JetBrains Mono Regular"/>
+                <a:ea typeface="JetBrains Mono Regular"/>
+                <a:cs typeface="JetBrains Mono Regular"/>
+                <a:sym typeface="JetBrains Mono Regular"/>
+              </a:defRPr>
+            </a:pPr>
+            <a:r>
+              <a:t>    auth-store.ts</a:t>
+            </a:r>
+          </a:p>
+          <a:p>
+            <a:pPr>
+              <a:lnSpc>
+                <a:spcPts val="1600"/>
+              </a:lnSpc>
+              <a:defRPr sz="1200">
+                <a:solidFill>
+                  <a:srgbClr val="F2F2F2"/>
+                </a:solidFill>
+                <a:latin typeface="JetBrains Mono Regular"/>
+                <a:ea typeface="JetBrains Mono Regular"/>
+                <a:cs typeface="JetBrains Mono Regular"/>
+                <a:sym typeface="JetBrains Mono Regular"/>
+              </a:defRPr>
+            </a:pPr>
+            <a:r>
+              <a:t>  api/</a:t>
+            </a:r>
+          </a:p>
+          <a:p>
+            <a:pPr>
+              <a:lnSpc>
+                <a:spcPts val="1600"/>
+              </a:lnSpc>
+              <a:defRPr sz="1200">
+                <a:solidFill>
+                  <a:srgbClr val="F2F2F2"/>
+                </a:solidFill>
+                <a:latin typeface="JetBrains Mono Regular"/>
+                <a:ea typeface="JetBrains Mono Regular"/>
+                <a:cs typeface="JetBrains Mono Regular"/>
+                <a:sym typeface="JetBrains Mono Regular"/>
+              </a:defRPr>
+            </a:pPr>
+            <a:r>
+              <a:t>    login.ts</a:t>
+            </a:r>
+          </a:p>
+          <a:p>
+            <a:pPr>
+              <a:lnSpc>
+                <a:spcPts val="1600"/>
+              </a:lnSpc>
+              <a:defRPr sz="1200">
+                <a:solidFill>
+                  <a:srgbClr val="FFFFFF"/>
+                </a:solidFill>
+                <a:latin typeface="JetBrains Mono Regular"/>
+                <a:ea typeface="JetBrains Mono Regular"/>
+                <a:cs typeface="JetBrains Mono Regular"/>
+                <a:sym typeface="JetBrains Mono Regular"/>
+              </a:defRPr>
+            </a:pPr>
+            <a:r>
+              <a:t>  </a:t>
+            </a:r>
+            <a:r>
+              <a:rPr>
+                <a:solidFill>
+                  <a:srgbClr val="00D4FF"/>
+                </a:solidFill>
+              </a:rPr>
+              <a:t>index.ts</a:t>
+            </a:r>
+            <a:r>
+              <a:t>   </a:t>
+            </a:r>
+            <a:r>
+              <a:rPr>
+                <a:solidFill>
+                  <a:srgbClr val="666666"/>
+                </a:solidFill>
+              </a:rPr>
+              <a:t>← jedini ulaz</a:t>
+            </a:r>
+          </a:p>
+        </p:txBody>
+      </p:sp>
+      <p:sp>
+        <p:nvSpPr>
+          <p:cNvPr id="427" name="Rectangle 6"/>
+          <p:cNvSpPr/>
+          <p:nvPr/>
+        </p:nvSpPr>
+        <p:spPr>
+          <a:xfrm>
+            <a:off x="6217920" y="2194560"/>
+            <a:ext cx="5669280" cy="3017521"/>
+          </a:xfrm>
+          <a:prstGeom prst="rect">
+            <a:avLst/>
+          </a:prstGeom>
+          <a:solidFill>
+            <a:srgbClr val="1A1A2E"/>
+          </a:solidFill>
+          <a:ln w="12700">
+            <a:miter lim="400000"/>
+          </a:ln>
+        </p:spPr>
+        <p:txBody>
+          <a:bodyPr lIns="45718" tIns="45718" rIns="45718" bIns="45718" anchor="ctr"/>
+          <a:lstStyle/>
+          <a:p>
+            <a:pPr algn="ctr">
+              <a:defRPr>
+                <a:solidFill>
+                  <a:srgbClr val="FFFFFF"/>
+                </a:solidFill>
+              </a:defRPr>
+            </a:pPr>
+          </a:p>
+        </p:txBody>
+      </p:sp>
+      <p:sp>
+        <p:nvSpPr>
+          <p:cNvPr id="428" name="TextBox 7"/>
+          <p:cNvSpPr txBox="1"/>
+          <p:nvPr/>
+        </p:nvSpPr>
+        <p:spPr>
+          <a:xfrm>
+            <a:off x="6400800" y="2359152"/>
+            <a:ext cx="4706621" cy="1830071"/>
+          </a:xfrm>
+          <a:prstGeom prst="rect">
+            <a:avLst/>
+          </a:prstGeom>
+          <a:ln w="12700">
+            <a:miter lim="400000"/>
+          </a:ln>
+          <a:extLst>
+            <a:ext uri="{C572A759-6A51-4108-AA02-DFA0A04FC94B}">
+              <ma14:wrappingTextBoxFlag xmlns:ma14="http://schemas.microsoft.com/office/mac/drawingml/2011/main" val="1"/>
+            </a:ext>
+          </a:extLst>
+        </p:spPr>
+        <p:txBody>
+          <a:bodyPr wrap="none" lIns="0" tIns="0" rIns="0" bIns="0">
+            <a:spAutoFit/>
+          </a:bodyPr>
+          <a:lstStyle/>
+          <a:p>
+            <a:pPr>
+              <a:lnSpc>
+                <a:spcPts val="1600"/>
+              </a:lnSpc>
+              <a:defRPr sz="1100">
+                <a:solidFill>
+                  <a:srgbClr val="888888"/>
+                </a:solidFill>
+                <a:latin typeface="JetBrains Mono Regular"/>
+                <a:ea typeface="JetBrains Mono Regular"/>
+                <a:cs typeface="JetBrains Mono Regular"/>
+                <a:sym typeface="JetBrains Mono Regular"/>
+              </a:defRPr>
+            </a:pPr>
+            <a:r>
+              <a:t>// features/auth/index.ts</a:t>
+            </a:r>
+          </a:p>
+          <a:p>
+            <a:pPr>
+              <a:lnSpc>
+                <a:spcPts val="1600"/>
+              </a:lnSpc>
+              <a:defRPr sz="1100">
+                <a:solidFill>
+                  <a:srgbClr val="00D4FF"/>
+                </a:solidFill>
+                <a:latin typeface="JetBrains Mono Regular"/>
+                <a:ea typeface="JetBrains Mono Regular"/>
+                <a:cs typeface="JetBrains Mono Regular"/>
+                <a:sym typeface="JetBrains Mono Regular"/>
+              </a:defRPr>
+            </a:pPr>
+            <a:r>
+              <a:t>export </a:t>
+            </a:r>
+            <a:r>
+              <a:rPr>
+                <a:solidFill>
+                  <a:srgbClr val="F2F2F2"/>
+                </a:solidFill>
+              </a:rPr>
+              <a:t>{ LoginForm } from './ui/LoginForm'</a:t>
+            </a:r>
+            <a:endParaRPr>
+              <a:solidFill>
+                <a:srgbClr val="F2F2F2"/>
+              </a:solidFill>
+            </a:endParaRPr>
+          </a:p>
+          <a:p>
+            <a:pPr>
+              <a:lnSpc>
+                <a:spcPts val="1600"/>
+              </a:lnSpc>
+              <a:defRPr sz="1100">
+                <a:solidFill>
+                  <a:srgbClr val="00D4FF"/>
+                </a:solidFill>
+                <a:latin typeface="JetBrains Mono Regular"/>
+                <a:ea typeface="JetBrains Mono Regular"/>
+                <a:cs typeface="JetBrains Mono Regular"/>
+                <a:sym typeface="JetBrains Mono Regular"/>
+              </a:defRPr>
+            </a:pPr>
+            <a:r>
+              <a:t>export </a:t>
+            </a:r>
+            <a:r>
+              <a:rPr>
+                <a:solidFill>
+                  <a:srgbClr val="F2F2F2"/>
+                </a:solidFill>
+              </a:rPr>
+              <a:t>{ useAuth } from './model/auth-store'</a:t>
+            </a:r>
+            <a:endParaRPr>
+              <a:solidFill>
+                <a:srgbClr val="F2F2F2"/>
+              </a:solidFill>
+            </a:endParaRPr>
+          </a:p>
+          <a:p>
+            <a:pPr>
+              <a:lnSpc>
+                <a:spcPts val="1600"/>
+              </a:lnSpc>
+              <a:defRPr sz="1100">
+                <a:solidFill>
+                  <a:srgbClr val="FFFFFF"/>
+                </a:solidFill>
+                <a:latin typeface="JetBrains Mono Regular"/>
+                <a:ea typeface="JetBrains Mono Regular"/>
+                <a:cs typeface="JetBrains Mono Regular"/>
+                <a:sym typeface="JetBrains Mono Regular"/>
+              </a:defRPr>
+            </a:pPr>
+            <a:r>
+              <a:t> </a:t>
+            </a:r>
+          </a:p>
+          <a:p>
+            <a:pPr>
+              <a:lnSpc>
+                <a:spcPts val="1600"/>
+              </a:lnSpc>
+              <a:defRPr sz="1100">
+                <a:solidFill>
+                  <a:srgbClr val="888888"/>
+                </a:solidFill>
+                <a:latin typeface="JetBrains Mono Regular"/>
+                <a:ea typeface="JetBrains Mono Regular"/>
+                <a:cs typeface="JetBrains Mono Regular"/>
+                <a:sym typeface="JetBrains Mono Regular"/>
+              </a:defRPr>
+            </a:pPr>
+            <a:r>
+              <a:t>// Svugdje drugdje:</a:t>
+            </a:r>
+          </a:p>
+          <a:p>
+            <a:pPr>
+              <a:lnSpc>
+                <a:spcPts val="1600"/>
+              </a:lnSpc>
+              <a:defRPr sz="1100">
+                <a:solidFill>
+                  <a:srgbClr val="2ED573"/>
+                </a:solidFill>
+                <a:latin typeface="JetBrains Mono Regular"/>
+                <a:ea typeface="JetBrains Mono Regular"/>
+                <a:cs typeface="JetBrains Mono Regular"/>
+                <a:sym typeface="JetBrains Mono Regular"/>
+              </a:defRPr>
+            </a:pPr>
+            <a:r>
+              <a:t>import { LoginForm } from '@/features/auth'</a:t>
+            </a:r>
+          </a:p>
+          <a:p>
+            <a:pPr>
+              <a:lnSpc>
+                <a:spcPts val="1600"/>
+              </a:lnSpc>
+              <a:defRPr sz="1100">
+                <a:solidFill>
+                  <a:srgbClr val="FFFFFF"/>
+                </a:solidFill>
+                <a:latin typeface="JetBrains Mono Regular"/>
+                <a:ea typeface="JetBrains Mono Regular"/>
+                <a:cs typeface="JetBrains Mono Regular"/>
+                <a:sym typeface="JetBrains Mono Regular"/>
+              </a:defRPr>
+            </a:pPr>
+            <a:r>
+              <a:t> </a:t>
+            </a:r>
+          </a:p>
+          <a:p>
+            <a:pPr>
+              <a:lnSpc>
+                <a:spcPts val="1600"/>
+              </a:lnSpc>
+              <a:defRPr sz="1100">
+                <a:solidFill>
+                  <a:srgbClr val="FF6B81"/>
+                </a:solidFill>
+                <a:latin typeface="JetBrains Mono Regular"/>
+                <a:ea typeface="JetBrains Mono Regular"/>
+                <a:cs typeface="JetBrains Mono Regular"/>
+                <a:sym typeface="JetBrains Mono Regular"/>
+              </a:defRPr>
+            </a:pPr>
+            <a:r>
+              <a:t>// Zabranjeno:</a:t>
+            </a:r>
+          </a:p>
+          <a:p>
+            <a:pPr>
+              <a:lnSpc>
+                <a:spcPts val="1600"/>
+              </a:lnSpc>
+              <a:defRPr sz="1100">
+                <a:solidFill>
+                  <a:srgbClr val="FF6B81"/>
+                </a:solidFill>
+                <a:latin typeface="JetBrains Mono Regular"/>
+                <a:ea typeface="JetBrains Mono Regular"/>
+                <a:cs typeface="JetBrains Mono Regular"/>
+                <a:sym typeface="JetBrains Mono Regular"/>
+              </a:defRPr>
+            </a:pPr>
+            <a:r>
+              <a:t>import { LoginForm } from '@/features/auth/ui/LoginForm'</a:t>
+            </a:r>
+          </a:p>
+        </p:txBody>
+      </p:sp>
+      <p:sp>
+        <p:nvSpPr>
+          <p:cNvPr id="429" name="Rounded Rectangle 8"/>
+          <p:cNvSpPr/>
+          <p:nvPr/>
+        </p:nvSpPr>
+        <p:spPr>
+          <a:xfrm>
+            <a:off x="640080" y="5440679"/>
+            <a:ext cx="10972801" cy="1005841"/>
+          </a:xfrm>
+          <a:prstGeom prst="roundRect">
+            <a:avLst>
+              <a:gd name="adj" fmla="val 8000"/>
+            </a:avLst>
+          </a:prstGeom>
+          <a:solidFill>
+            <a:srgbClr val="0E3A47"/>
+          </a:solidFill>
+          <a:ln w="12700">
+            <a:miter lim="400000"/>
+          </a:ln>
+        </p:spPr>
+        <p:txBody>
+          <a:bodyPr lIns="45718" tIns="45718" rIns="45718" bIns="45718" anchor="ctr"/>
+          <a:lstStyle/>
+          <a:p>
+            <a:pPr algn="ctr">
+              <a:defRPr>
+                <a:solidFill>
+                  <a:srgbClr val="FFFFFF"/>
+                </a:solidFill>
+              </a:defRPr>
+            </a:pPr>
+          </a:p>
+        </p:txBody>
+      </p:sp>
+      <p:sp>
+        <p:nvSpPr>
+          <p:cNvPr id="430" name="Rectangle 9"/>
+          <p:cNvSpPr/>
+          <p:nvPr/>
+        </p:nvSpPr>
+        <p:spPr>
+          <a:xfrm>
+            <a:off x="640080" y="5440679"/>
+            <a:ext cx="54865" cy="1005840"/>
+          </a:xfrm>
+          <a:prstGeom prst="rect">
+            <a:avLst/>
+          </a:prstGeom>
+          <a:solidFill>
+            <a:srgbClr val="00D4FF"/>
+          </a:solidFill>
+          <a:ln w="12700">
+            <a:miter lim="400000"/>
+          </a:ln>
+        </p:spPr>
+        <p:txBody>
+          <a:bodyPr lIns="45718" tIns="45718" rIns="45718" bIns="45718" anchor="ctr"/>
+          <a:lstStyle/>
+          <a:p>
+            <a:pPr algn="ctr">
+              <a:defRPr>
+                <a:solidFill>
+                  <a:srgbClr val="FFFFFF"/>
+                </a:solidFill>
+              </a:defRPr>
+            </a:pPr>
+          </a:p>
+        </p:txBody>
+      </p:sp>
+      <p:sp>
+        <p:nvSpPr>
+          <p:cNvPr id="431" name="TextBox 10"/>
+          <p:cNvSpPr txBox="1"/>
+          <p:nvPr/>
+        </p:nvSpPr>
+        <p:spPr>
+          <a:xfrm>
+            <a:off x="914400" y="5623559"/>
+            <a:ext cx="10515600" cy="495301"/>
+          </a:xfrm>
+          <a:prstGeom prst="rect">
+            <a:avLst/>
+          </a:prstGeom>
+          <a:ln w="12700">
+            <a:miter lim="400000"/>
+          </a:ln>
+          <a:extLst>
+            <a:ext uri="{C572A759-6A51-4108-AA02-DFA0A04FC94B}">
+              <ma14:wrappingTextBoxFlag xmlns:ma14="http://schemas.microsoft.com/office/mac/drawingml/2011/main" val="1"/>
+            </a:ext>
+          </a:extLst>
+        </p:spPr>
+        <p:txBody>
+          <a:bodyPr lIns="0" tIns="0" rIns="0" bIns="0">
+            <a:spAutoFit/>
+          </a:bodyPr>
+          <a:lstStyle/>
+          <a:p>
+            <a:pPr>
+              <a:defRPr sz="1500">
+                <a:solidFill>
+                  <a:srgbClr val="FFFFFF"/>
+                </a:solidFill>
+                <a:latin typeface="Inter Regular"/>
+                <a:ea typeface="Inter Regular"/>
+                <a:cs typeface="Inter Regular"/>
+                <a:sym typeface="Inter Regular"/>
+              </a:defRPr>
+            </a:pPr>
+            <a:r>
+              <a:t>AI pročita </a:t>
+            </a:r>
+            <a:r>
+              <a:rPr>
+                <a:solidFill>
+                  <a:srgbClr val="00D4FF"/>
+                </a:solidFill>
+                <a:latin typeface="JetBrains Mono Regular"/>
+                <a:ea typeface="JetBrains Mono Regular"/>
+                <a:cs typeface="JetBrains Mono Regular"/>
+                <a:sym typeface="JetBrains Mono Regular"/>
+              </a:rPr>
+              <a:t>index.ts</a:t>
+            </a:r>
+            <a:r>
+              <a:t> (8 redova) i zna kompletno sučelje slice-a — umjesto da učita 400+ linija interne implementacije. </a:t>
+            </a:r>
+            <a:r>
+              <a:rPr>
+                <a:solidFill>
+                  <a:srgbClr val="00D4FF"/>
+                </a:solidFill>
+                <a:latin typeface="Inter Bold"/>
+                <a:ea typeface="Inter Bold"/>
+                <a:cs typeface="Inter Bold"/>
+                <a:sym typeface="Inter Bold"/>
+              </a:rPr>
+              <a:t>Štedi tokene, stabilan ugovor.</a:t>
+            </a:r>
+          </a:p>
+        </p:txBody>
+      </p:sp>
     </p:spTree>
   </p:cSld>
   <p:clrMapOvr>
@@ -16353,7 +17793,7 @@
 </p:sld>
 </file>
 
-<file path=ppt/slides/slide30.xml><?xml version="1.0" encoding="utf-8"?>
+<file path=ppt/slides/slide34.xml><?xml version="1.0" encoding="utf-8"?>
 <p:sld xmlns:a="http://schemas.openxmlformats.org/drawingml/2006/main" xmlns:r="http://schemas.openxmlformats.org/officeDocument/2006/relationships" xmlns:p="http://schemas.openxmlformats.org/presentationml/2006/main" xmlns:m="http://schemas.openxmlformats.org/officeDocument/2006/math" xmlns:a14="http://schemas.microsoft.com/office/drawing/2010/main" showMasterSp="1" showMasterPhAnim="1">
   <p:cSld>
     <p:spTree>
@@ -16372,7 +17812,7 @@
       </p:grpSpPr>
       <p:sp>
         <p:nvSpPr>
-          <p:cNvPr id="406" name="TextBox 1"/>
+          <p:cNvPr id="435" name="TextBox 1"/>
           <p:cNvSpPr txBox="1"/>
           <p:nvPr/>
         </p:nvSpPr>
@@ -16411,7 +17851,7 @@
               </a:defRPr>
             </a:pPr>
             <a:r>
-              <a:t>Pravilo #3: </a:t>
+              <a:t>AI alati </a:t>
             </a:r>
             <a:r>
               <a:rPr>
@@ -16419,21 +17859,21 @@
                   <a:srgbClr val="00D4FF"/>
                 </a:solidFill>
               </a:rPr>
-              <a:t>Public API</a:t>
-            </a:r>
-          </a:p>
-        </p:txBody>
-      </p:sp>
-      <p:sp>
-        <p:nvSpPr>
-          <p:cNvPr id="407" name="TextBox 2"/>
+              <a:t>za FSD</a:t>
+            </a:r>
+          </a:p>
+        </p:txBody>
+      </p:sp>
+      <p:sp>
+        <p:nvSpPr>
+          <p:cNvPr id="436" name="TextBox 2"/>
           <p:cNvSpPr txBox="1"/>
           <p:nvPr/>
         </p:nvSpPr>
         <p:spPr>
           <a:xfrm>
             <a:off x="640079" y="1371600"/>
-            <a:ext cx="10908794" cy="228600"/>
+            <a:ext cx="10908794" cy="215900"/>
           </a:xfrm>
           <a:prstGeom prst="rect">
             <a:avLst/>
@@ -16451,9 +17891,8 @@
           <a:bodyPr lIns="0" tIns="0" rIns="0" bIns="0">
             <a:spAutoFit/>
           </a:bodyPr>
-          <a:lstStyle/>
-          <a:p>
-            <a:pPr>
+          <a:lstStyle>
+            <a:lvl1pPr>
               <a:defRPr sz="1400">
                 <a:solidFill>
                   <a:srgbClr val="888888"/>
@@ -16463,9 +17902,208 @@
                 <a:cs typeface="Inter Regular"/>
                 <a:sym typeface="Inter Regular"/>
               </a:defRPr>
+            </a:lvl1pPr>
+          </a:lstStyle>
+          <a:p>
+            <a:pPr/>
+            <a:r>
+              <a:t>Daj AI-u FSD dokumentaciju kao kontekst — ne mora pogađati pravila.</a:t>
+            </a:r>
+          </a:p>
+        </p:txBody>
+      </p:sp>
+      <p:sp>
+        <p:nvSpPr>
+          <p:cNvPr id="437" name="Rectangle 3"/>
+          <p:cNvSpPr/>
+          <p:nvPr/>
+        </p:nvSpPr>
+        <p:spPr>
+          <a:xfrm>
+            <a:off x="640080" y="1691639"/>
+            <a:ext cx="548641" cy="36577"/>
+          </a:xfrm>
+          <a:prstGeom prst="rect">
+            <a:avLst/>
+          </a:prstGeom>
+          <a:solidFill>
+            <a:srgbClr val="00D4FF"/>
+          </a:solidFill>
+          <a:ln w="12700">
+            <a:miter lim="400000"/>
+          </a:ln>
+        </p:spPr>
+        <p:txBody>
+          <a:bodyPr lIns="45718" tIns="45718" rIns="45718" bIns="45718" anchor="ctr"/>
+          <a:lstStyle/>
+          <a:p>
+            <a:pPr algn="ctr">
+              <a:defRPr>
+                <a:solidFill>
+                  <a:srgbClr val="FFFFFF"/>
+                </a:solidFill>
+              </a:defRPr>
             </a:pPr>
-            <a:r>
-              <a:t>Svaki slice eksponira </a:t>
+          </a:p>
+        </p:txBody>
+      </p:sp>
+      <p:sp>
+        <p:nvSpPr>
+          <p:cNvPr id="438" name="TextBox 4"/>
+          <p:cNvSpPr txBox="1"/>
+          <p:nvPr/>
+        </p:nvSpPr>
+        <p:spPr>
+          <a:xfrm>
+            <a:off x="640080" y="2194560"/>
+            <a:ext cx="5486401" cy="266701"/>
+          </a:xfrm>
+          <a:prstGeom prst="rect">
+            <a:avLst/>
+          </a:prstGeom>
+          <a:ln w="12700">
+            <a:miter lim="400000"/>
+          </a:ln>
+          <a:extLst>
+            <a:ext uri="{C572A759-6A51-4108-AA02-DFA0A04FC94B}">
+              <ma14:wrappingTextBoxFlag xmlns:ma14="http://schemas.microsoft.com/office/mac/drawingml/2011/main" val="1"/>
+            </a:ext>
+          </a:extLst>
+        </p:spPr>
+        <p:txBody>
+          <a:bodyPr lIns="0" tIns="0" rIns="0" bIns="0">
+            <a:spAutoFit/>
+          </a:bodyPr>
+          <a:lstStyle>
+            <a:lvl1pPr>
+              <a:defRPr>
+                <a:solidFill>
+                  <a:srgbClr val="00D4FF"/>
+                </a:solidFill>
+                <a:latin typeface="Inter Bold"/>
+                <a:ea typeface="Inter Bold"/>
+                <a:cs typeface="Inter Bold"/>
+                <a:sym typeface="Inter Bold"/>
+              </a:defRPr>
+            </a:lvl1pPr>
+          </a:lstStyle>
+          <a:p>
+            <a:pPr/>
+            <a:r>
+              <a:t>LLMs.txt</a:t>
+            </a:r>
+          </a:p>
+        </p:txBody>
+      </p:sp>
+      <p:sp>
+        <p:nvSpPr>
+          <p:cNvPr id="439" name="TextBox 5"/>
+          <p:cNvSpPr txBox="1"/>
+          <p:nvPr/>
+        </p:nvSpPr>
+        <p:spPr>
+          <a:xfrm>
+            <a:off x="640080" y="2606039"/>
+            <a:ext cx="5486401" cy="228601"/>
+          </a:xfrm>
+          <a:prstGeom prst="rect">
+            <a:avLst/>
+          </a:prstGeom>
+          <a:ln w="12700">
+            <a:miter lim="400000"/>
+          </a:ln>
+          <a:extLst>
+            <a:ext uri="{C572A759-6A51-4108-AA02-DFA0A04FC94B}">
+              <ma14:wrappingTextBoxFlag xmlns:ma14="http://schemas.microsoft.com/office/mac/drawingml/2011/main" val="1"/>
+            </a:ext>
+          </a:extLst>
+        </p:spPr>
+        <p:txBody>
+          <a:bodyPr lIns="0" tIns="0" rIns="0" bIns="0">
+            <a:spAutoFit/>
+          </a:bodyPr>
+          <a:lstStyle>
+            <a:lvl1pPr>
+              <a:defRPr sz="1400">
+                <a:solidFill>
+                  <a:srgbClr val="F2F2F2"/>
+                </a:solidFill>
+                <a:latin typeface="JetBrains Mono Regular"/>
+                <a:ea typeface="JetBrains Mono Regular"/>
+                <a:cs typeface="JetBrains Mono Regular"/>
+                <a:sym typeface="JetBrains Mono Regular"/>
+              </a:defRPr>
+            </a:lvl1pPr>
+          </a:lstStyle>
+          <a:p>
+            <a:pPr/>
+            <a:r>
+              <a:t>fsd.how/llms-full.txt</a:t>
+            </a:r>
+          </a:p>
+        </p:txBody>
+      </p:sp>
+      <p:sp>
+        <p:nvSpPr>
+          <p:cNvPr id="440" name="TextBox 6"/>
+          <p:cNvSpPr txBox="1"/>
+          <p:nvPr/>
+        </p:nvSpPr>
+        <p:spPr>
+          <a:xfrm>
+            <a:off x="640080" y="3154679"/>
+            <a:ext cx="5486401" cy="977901"/>
+          </a:xfrm>
+          <a:prstGeom prst="rect">
+            <a:avLst/>
+          </a:prstGeom>
+          <a:ln w="12700">
+            <a:miter lim="400000"/>
+          </a:ln>
+          <a:extLst>
+            <a:ext uri="{C572A759-6A51-4108-AA02-DFA0A04FC94B}">
+              <ma14:wrappingTextBoxFlag xmlns:ma14="http://schemas.microsoft.com/office/mac/drawingml/2011/main" val="1"/>
+            </a:ext>
+          </a:extLst>
+        </p:spPr>
+        <p:txBody>
+          <a:bodyPr lIns="0" tIns="0" rIns="0" bIns="0">
+            <a:spAutoFit/>
+          </a:bodyPr>
+          <a:lstStyle/>
+          <a:p>
+            <a:pPr>
+              <a:defRPr sz="1400">
+                <a:solidFill>
+                  <a:srgbClr val="FFFFFF"/>
+                </a:solidFill>
+                <a:latin typeface="Inter Regular"/>
+                <a:ea typeface="Inter Regular"/>
+                <a:cs typeface="Inter Regular"/>
+                <a:sym typeface="Inter Regular"/>
+              </a:defRPr>
+            </a:pPr>
+            <a:r>
+              <a:t>Cijela FSD specifikacija u jednom plain-text fileu — formatirana baš tako da je AI agenti mogu lako progutati.</a:t>
+            </a:r>
+          </a:p>
+          <a:p>
+            <a:pPr>
+              <a:spcBef>
+                <a:spcPts val="800"/>
+              </a:spcBef>
+              <a:defRPr sz="1400">
+                <a:solidFill>
+                  <a:srgbClr val="FFFFFF"/>
+                </a:solidFill>
+                <a:latin typeface="Inter Regular"/>
+                <a:ea typeface="Inter Regular"/>
+                <a:cs typeface="Inter Regular"/>
+                <a:sym typeface="Inter Regular"/>
+              </a:defRPr>
+            </a:pPr>
+            <a:r>
+              <a:t>Doda se u </a:t>
             </a:r>
             <a:r>
               <a:rPr>
@@ -16477,24 +18115,249 @@
                 <a:cs typeface="JetBrains Mono Regular"/>
                 <a:sym typeface="JetBrains Mono Regular"/>
               </a:rPr>
-              <a:t>index.ts</a:t>
-            </a:r>
-            <a:r>
-              <a:t> kao ugovor</a:t>
-            </a:r>
-          </a:p>
-        </p:txBody>
-      </p:sp>
-      <p:sp>
-        <p:nvSpPr>
-          <p:cNvPr id="408" name="Rectangle 3"/>
+              <a:t>CLAUDE.md</a:t>
+            </a:r>
+            <a:r>
+              <a:t> / </a:t>
+            </a:r>
+            <a:r>
+              <a:rPr>
+                <a:solidFill>
+                  <a:srgbClr val="00D4FF"/>
+                </a:solidFill>
+                <a:latin typeface="JetBrains Mono Regular"/>
+                <a:ea typeface="JetBrains Mono Regular"/>
+                <a:cs typeface="JetBrains Mono Regular"/>
+                <a:sym typeface="JetBrains Mono Regular"/>
+              </a:rPr>
+              <a:t>AGENTS.md</a:t>
+            </a:r>
+            <a:r>
+              <a:t> ili kao referenca u promptu — AI dobiva pravila prije nego napiše ijednu liniju.</a:t>
+            </a:r>
+          </a:p>
+        </p:txBody>
+      </p:sp>
+      <p:sp>
+        <p:nvSpPr>
+          <p:cNvPr id="441" name="TextBox 7"/>
+          <p:cNvSpPr txBox="1"/>
+          <p:nvPr/>
+        </p:nvSpPr>
+        <p:spPr>
+          <a:xfrm>
+            <a:off x="6400800" y="2194560"/>
+            <a:ext cx="5486400" cy="266701"/>
+          </a:xfrm>
+          <a:prstGeom prst="rect">
+            <a:avLst/>
+          </a:prstGeom>
+          <a:ln w="12700">
+            <a:miter lim="400000"/>
+          </a:ln>
+          <a:extLst>
+            <a:ext uri="{C572A759-6A51-4108-AA02-DFA0A04FC94B}">
+              <ma14:wrappingTextBoxFlag xmlns:ma14="http://schemas.microsoft.com/office/mac/drawingml/2011/main" val="1"/>
+            </a:ext>
+          </a:extLst>
+        </p:spPr>
+        <p:txBody>
+          <a:bodyPr lIns="0" tIns="0" rIns="0" bIns="0">
+            <a:spAutoFit/>
+          </a:bodyPr>
+          <a:lstStyle>
+            <a:lvl1pPr>
+              <a:defRPr>
+                <a:solidFill>
+                  <a:srgbClr val="00D4FF"/>
+                </a:solidFill>
+                <a:latin typeface="Inter Bold"/>
+                <a:ea typeface="Inter Bold"/>
+                <a:cs typeface="Inter Bold"/>
+                <a:sym typeface="Inter Bold"/>
+              </a:defRPr>
+            </a:lvl1pPr>
+          </a:lstStyle>
+          <a:p>
+            <a:pPr/>
+            <a:r>
+              <a:t>feature-sliced-design Skill</a:t>
+            </a:r>
+          </a:p>
+        </p:txBody>
+      </p:sp>
+      <p:sp>
+        <p:nvSpPr>
+          <p:cNvPr id="442" name="TextBox 8"/>
+          <p:cNvSpPr txBox="1"/>
+          <p:nvPr/>
+        </p:nvSpPr>
+        <p:spPr>
+          <a:xfrm>
+            <a:off x="6400800" y="2606039"/>
+            <a:ext cx="5486400" cy="228601"/>
+          </a:xfrm>
+          <a:prstGeom prst="rect">
+            <a:avLst/>
+          </a:prstGeom>
+          <a:ln w="12700">
+            <a:miter lim="400000"/>
+          </a:ln>
+          <a:extLst>
+            <a:ext uri="{C572A759-6A51-4108-AA02-DFA0A04FC94B}">
+              <ma14:wrappingTextBoxFlag xmlns:ma14="http://schemas.microsoft.com/office/mac/drawingml/2011/main" val="1"/>
+            </a:ext>
+          </a:extLst>
+        </p:spPr>
+        <p:txBody>
+          <a:bodyPr lIns="0" tIns="0" rIns="0" bIns="0">
+            <a:spAutoFit/>
+          </a:bodyPr>
+          <a:lstStyle>
+            <a:lvl1pPr>
+              <a:defRPr sz="1400">
+                <a:solidFill>
+                  <a:srgbClr val="F2F2F2"/>
+                </a:solidFill>
+                <a:latin typeface="JetBrains Mono Regular"/>
+                <a:ea typeface="JetBrains Mono Regular"/>
+                <a:cs typeface="JetBrains Mono Regular"/>
+                <a:sym typeface="JetBrains Mono Regular"/>
+              </a:defRPr>
+            </a:lvl1pPr>
+          </a:lstStyle>
+          <a:p>
+            <a:pPr/>
+            <a:r>
+              <a:t>/feature-sliced-design</a:t>
+            </a:r>
+          </a:p>
+        </p:txBody>
+      </p:sp>
+      <p:sp>
+        <p:nvSpPr>
+          <p:cNvPr id="443" name="TextBox 9"/>
+          <p:cNvSpPr txBox="1"/>
+          <p:nvPr/>
+        </p:nvSpPr>
+        <p:spPr>
+          <a:xfrm>
+            <a:off x="6400800" y="3154679"/>
+            <a:ext cx="5486400" cy="1181101"/>
+          </a:xfrm>
+          <a:prstGeom prst="rect">
+            <a:avLst/>
+          </a:prstGeom>
+          <a:ln w="12700">
+            <a:miter lim="400000"/>
+          </a:ln>
+          <a:extLst>
+            <a:ext uri="{C572A759-6A51-4108-AA02-DFA0A04FC94B}">
+              <ma14:wrappingTextBoxFlag xmlns:ma14="http://schemas.microsoft.com/office/mac/drawingml/2011/main" val="1"/>
+            </a:ext>
+          </a:extLst>
+        </p:spPr>
+        <p:txBody>
+          <a:bodyPr lIns="0" tIns="0" rIns="0" bIns="0">
+            <a:spAutoFit/>
+          </a:bodyPr>
+          <a:lstStyle/>
+          <a:p>
+            <a:pPr>
+              <a:defRPr sz="1400">
+                <a:solidFill>
+                  <a:srgbClr val="FFFFFF"/>
+                </a:solidFill>
+                <a:latin typeface="Inter Regular"/>
+                <a:ea typeface="Inter Regular"/>
+                <a:cs typeface="Inter Regular"/>
+                <a:sym typeface="Inter Regular"/>
+              </a:defRPr>
+            </a:pPr>
+            <a:r>
+              <a:t>Službeni Claude Code skill — aktivira se automatski kad se radi o FSD strukturi (gdje datoteku staviti, public API, cross-import, segmenti).</a:t>
+            </a:r>
+          </a:p>
+          <a:p>
+            <a:pPr>
+              <a:spcBef>
+                <a:spcPts val="800"/>
+              </a:spcBef>
+              <a:defRPr sz="1400">
+                <a:solidFill>
+                  <a:srgbClr val="FFFFFF"/>
+                </a:solidFill>
+                <a:latin typeface="Inter Regular"/>
+                <a:ea typeface="Inter Regular"/>
+                <a:cs typeface="Inter Regular"/>
+                <a:sym typeface="Inter Regular"/>
+              </a:defRPr>
+            </a:pPr>
+            <a:r>
+              <a:t>Sadrži decision tree, anti-patterne i conditional reference fileove </a:t>
+            </a:r>
+            <a:r>
+              <a:rPr>
+                <a:solidFill>
+                  <a:srgbClr val="00D4FF"/>
+                </a:solidFill>
+                <a:latin typeface="Inter Bold"/>
+                <a:ea typeface="Inter Bold"/>
+                <a:cs typeface="Inter Bold"/>
+                <a:sym typeface="Inter Bold"/>
+              </a:rPr>
+              <a:t>— zna kada koje znanje učitati u kontekst.</a:t>
+            </a:r>
+          </a:p>
+        </p:txBody>
+      </p:sp>
+      <p:sp>
+        <p:nvSpPr>
+          <p:cNvPr id="444" name="Rounded Rectangle 10"/>
           <p:cNvSpPr/>
           <p:nvPr/>
         </p:nvSpPr>
         <p:spPr>
           <a:xfrm>
-            <a:off x="640080" y="1691639"/>
-            <a:ext cx="548641" cy="36577"/>
+            <a:off x="640080" y="5074920"/>
+            <a:ext cx="10972801" cy="1188721"/>
+          </a:xfrm>
+          <a:prstGeom prst="roundRect">
+            <a:avLst>
+              <a:gd name="adj" fmla="val 8000"/>
+            </a:avLst>
+          </a:prstGeom>
+          <a:solidFill>
+            <a:srgbClr val="0E3A47"/>
+          </a:solidFill>
+          <a:ln w="12700">
+            <a:miter lim="400000"/>
+          </a:ln>
+        </p:spPr>
+        <p:txBody>
+          <a:bodyPr lIns="45718" tIns="45718" rIns="45718" bIns="45718" anchor="ctr"/>
+          <a:lstStyle/>
+          <a:p>
+            <a:pPr algn="ctr">
+              <a:defRPr>
+                <a:solidFill>
+                  <a:srgbClr val="FFFFFF"/>
+                </a:solidFill>
+              </a:defRPr>
+            </a:pPr>
+          </a:p>
+        </p:txBody>
+      </p:sp>
+      <p:sp>
+        <p:nvSpPr>
+          <p:cNvPr id="445" name="Rectangle 11"/>
+          <p:cNvSpPr/>
+          <p:nvPr/>
+        </p:nvSpPr>
+        <p:spPr>
+          <a:xfrm>
+            <a:off x="640080" y="5074920"/>
+            <a:ext cx="54865" cy="1188721"/>
           </a:xfrm>
           <a:prstGeom prst="rect">
             <a:avLst/>
@@ -16522,49 +18385,14 @@
       </p:sp>
       <p:sp>
         <p:nvSpPr>
-          <p:cNvPr id="409" name="Rectangle 4"/>
-          <p:cNvSpPr/>
-          <p:nvPr/>
-        </p:nvSpPr>
-        <p:spPr>
-          <a:xfrm>
-            <a:off x="640079" y="2194560"/>
-            <a:ext cx="5303522" cy="3017521"/>
-          </a:xfrm>
-          <a:prstGeom prst="rect">
-            <a:avLst/>
-          </a:prstGeom>
-          <a:solidFill>
-            <a:srgbClr val="1A1A2E"/>
-          </a:solidFill>
-          <a:ln w="12700">
-            <a:miter lim="400000"/>
-          </a:ln>
-        </p:spPr>
-        <p:txBody>
-          <a:bodyPr lIns="45718" tIns="45718" rIns="45718" bIns="45718" anchor="ctr"/>
-          <a:lstStyle/>
-          <a:p>
-            <a:pPr algn="ctr">
-              <a:defRPr>
-                <a:solidFill>
-                  <a:srgbClr val="FFFFFF"/>
-                </a:solidFill>
-              </a:defRPr>
-            </a:pPr>
-          </a:p>
-        </p:txBody>
-      </p:sp>
-      <p:sp>
-        <p:nvSpPr>
-          <p:cNvPr id="410" name="TextBox 5"/>
+          <p:cNvPr id="446" name="TextBox 12"/>
           <p:cNvSpPr txBox="1"/>
           <p:nvPr/>
         </p:nvSpPr>
         <p:spPr>
           <a:xfrm>
-            <a:off x="822958" y="2359152"/>
-            <a:ext cx="2390141" cy="1833881"/>
+            <a:off x="914400" y="5257800"/>
+            <a:ext cx="10515600" cy="533400"/>
           </a:xfrm>
           <a:prstGeom prst="rect">
             <a:avLst/>
@@ -16579,567 +18407,13 @@
           </a:extLst>
         </p:spPr>
         <p:txBody>
-          <a:bodyPr wrap="none" lIns="0" tIns="0" rIns="0" bIns="0">
-            <a:spAutoFit/>
-          </a:bodyPr>
-          <a:lstStyle/>
-          <a:p>
-            <a:pPr>
-              <a:lnSpc>
-                <a:spcPts val="1600"/>
-              </a:lnSpc>
-              <a:defRPr sz="1200">
-                <a:solidFill>
-                  <a:srgbClr val="F2F2F2"/>
-                </a:solidFill>
-                <a:latin typeface="JetBrains Mono Regular"/>
-                <a:ea typeface="JetBrains Mono Regular"/>
-                <a:cs typeface="JetBrains Mono Regular"/>
-                <a:sym typeface="JetBrains Mono Regular"/>
-              </a:defRPr>
-            </a:pPr>
-            <a:r>
-              <a:t>features/auth/</a:t>
-            </a:r>
-          </a:p>
-          <a:p>
-            <a:pPr>
-              <a:lnSpc>
-                <a:spcPts val="1600"/>
-              </a:lnSpc>
-              <a:defRPr sz="1200">
-                <a:solidFill>
-                  <a:srgbClr val="F2F2F2"/>
-                </a:solidFill>
-                <a:latin typeface="JetBrains Mono Regular"/>
-                <a:ea typeface="JetBrains Mono Regular"/>
-                <a:cs typeface="JetBrains Mono Regular"/>
-                <a:sym typeface="JetBrains Mono Regular"/>
-              </a:defRPr>
-            </a:pPr>
-            <a:r>
-              <a:t>  ui/</a:t>
-            </a:r>
-          </a:p>
-          <a:p>
-            <a:pPr>
-              <a:lnSpc>
-                <a:spcPts val="1600"/>
-              </a:lnSpc>
-              <a:defRPr sz="1200">
-                <a:solidFill>
-                  <a:srgbClr val="F2F2F2"/>
-                </a:solidFill>
-                <a:latin typeface="JetBrains Mono Regular"/>
-                <a:ea typeface="JetBrains Mono Regular"/>
-                <a:cs typeface="JetBrains Mono Regular"/>
-                <a:sym typeface="JetBrains Mono Regular"/>
-              </a:defRPr>
-            </a:pPr>
-            <a:r>
-              <a:t>    LoginForm.tsx</a:t>
-            </a:r>
-          </a:p>
-          <a:p>
-            <a:pPr>
-              <a:lnSpc>
-                <a:spcPts val="1600"/>
-              </a:lnSpc>
-              <a:defRPr sz="1200">
-                <a:solidFill>
-                  <a:srgbClr val="F2F2F2"/>
-                </a:solidFill>
-                <a:latin typeface="JetBrains Mono Regular"/>
-                <a:ea typeface="JetBrains Mono Regular"/>
-                <a:cs typeface="JetBrains Mono Regular"/>
-                <a:sym typeface="JetBrains Mono Regular"/>
-              </a:defRPr>
-            </a:pPr>
-            <a:r>
-              <a:t>    LogoutButton.tsx</a:t>
-            </a:r>
-          </a:p>
-          <a:p>
-            <a:pPr>
-              <a:lnSpc>
-                <a:spcPts val="1600"/>
-              </a:lnSpc>
-              <a:defRPr sz="1200">
-                <a:solidFill>
-                  <a:srgbClr val="F2F2F2"/>
-                </a:solidFill>
-                <a:latin typeface="JetBrains Mono Regular"/>
-                <a:ea typeface="JetBrains Mono Regular"/>
-                <a:cs typeface="JetBrains Mono Regular"/>
-                <a:sym typeface="JetBrains Mono Regular"/>
-              </a:defRPr>
-            </a:pPr>
-            <a:r>
-              <a:t>  model/</a:t>
-            </a:r>
-          </a:p>
-          <a:p>
-            <a:pPr>
-              <a:lnSpc>
-                <a:spcPts val="1600"/>
-              </a:lnSpc>
-              <a:defRPr sz="1200">
-                <a:solidFill>
-                  <a:srgbClr val="F2F2F2"/>
-                </a:solidFill>
-                <a:latin typeface="JetBrains Mono Regular"/>
-                <a:ea typeface="JetBrains Mono Regular"/>
-                <a:cs typeface="JetBrains Mono Regular"/>
-                <a:sym typeface="JetBrains Mono Regular"/>
-              </a:defRPr>
-            </a:pPr>
-            <a:r>
-              <a:t>    auth-store.ts</a:t>
-            </a:r>
-          </a:p>
-          <a:p>
-            <a:pPr>
-              <a:lnSpc>
-                <a:spcPts val="1600"/>
-              </a:lnSpc>
-              <a:defRPr sz="1200">
-                <a:solidFill>
-                  <a:srgbClr val="F2F2F2"/>
-                </a:solidFill>
-                <a:latin typeface="JetBrains Mono Regular"/>
-                <a:ea typeface="JetBrains Mono Regular"/>
-                <a:cs typeface="JetBrains Mono Regular"/>
-                <a:sym typeface="JetBrains Mono Regular"/>
-              </a:defRPr>
-            </a:pPr>
-            <a:r>
-              <a:t>  api/</a:t>
-            </a:r>
-          </a:p>
-          <a:p>
-            <a:pPr>
-              <a:lnSpc>
-                <a:spcPts val="1600"/>
-              </a:lnSpc>
-              <a:defRPr sz="1200">
-                <a:solidFill>
-                  <a:srgbClr val="F2F2F2"/>
-                </a:solidFill>
-                <a:latin typeface="JetBrains Mono Regular"/>
-                <a:ea typeface="JetBrains Mono Regular"/>
-                <a:cs typeface="JetBrains Mono Regular"/>
-                <a:sym typeface="JetBrains Mono Regular"/>
-              </a:defRPr>
-            </a:pPr>
-            <a:r>
-              <a:t>    login.ts</a:t>
-            </a:r>
-          </a:p>
-          <a:p>
-            <a:pPr>
-              <a:lnSpc>
-                <a:spcPts val="1600"/>
-              </a:lnSpc>
-              <a:defRPr sz="1200">
-                <a:solidFill>
-                  <a:srgbClr val="FFFFFF"/>
-                </a:solidFill>
-                <a:latin typeface="JetBrains Mono Regular"/>
-                <a:ea typeface="JetBrains Mono Regular"/>
-                <a:cs typeface="JetBrains Mono Regular"/>
-                <a:sym typeface="JetBrains Mono Regular"/>
-              </a:defRPr>
-            </a:pPr>
-            <a:r>
-              <a:t>  </a:t>
-            </a:r>
-            <a:r>
-              <a:rPr>
-                <a:solidFill>
-                  <a:srgbClr val="00D4FF"/>
-                </a:solidFill>
-              </a:rPr>
-              <a:t>index.ts</a:t>
-            </a:r>
-            <a:r>
-              <a:t>   </a:t>
-            </a:r>
-            <a:r>
-              <a:rPr>
-                <a:solidFill>
-                  <a:srgbClr val="666666"/>
-                </a:solidFill>
-              </a:rPr>
-              <a:t>← jedini ulaz</a:t>
-            </a:r>
-          </a:p>
-        </p:txBody>
-      </p:sp>
-      <p:sp>
-        <p:nvSpPr>
-          <p:cNvPr id="411" name="Rectangle 6"/>
-          <p:cNvSpPr/>
-          <p:nvPr/>
-        </p:nvSpPr>
-        <p:spPr>
-          <a:xfrm>
-            <a:off x="6217920" y="2194560"/>
-            <a:ext cx="5669280" cy="3017521"/>
-          </a:xfrm>
-          <a:prstGeom prst="rect">
-            <a:avLst/>
-          </a:prstGeom>
-          <a:solidFill>
-            <a:srgbClr val="1A1A2E"/>
-          </a:solidFill>
-          <a:ln w="12700">
-            <a:miter lim="400000"/>
-          </a:ln>
-        </p:spPr>
-        <p:txBody>
-          <a:bodyPr lIns="45718" tIns="45718" rIns="45718" bIns="45718" anchor="ctr"/>
-          <a:lstStyle/>
-          <a:p>
-            <a:pPr algn="ctr">
-              <a:defRPr>
-                <a:solidFill>
-                  <a:srgbClr val="FFFFFF"/>
-                </a:solidFill>
-              </a:defRPr>
-            </a:pPr>
-          </a:p>
-        </p:txBody>
-      </p:sp>
-      <p:sp>
-        <p:nvSpPr>
-          <p:cNvPr id="412" name="TextBox 7"/>
-          <p:cNvSpPr txBox="1"/>
-          <p:nvPr/>
-        </p:nvSpPr>
-        <p:spPr>
-          <a:xfrm>
-            <a:off x="6400800" y="2359152"/>
-            <a:ext cx="4706621" cy="1830071"/>
-          </a:xfrm>
-          <a:prstGeom prst="rect">
-            <a:avLst/>
-          </a:prstGeom>
-          <a:ln w="12700">
-            <a:miter lim="400000"/>
-          </a:ln>
-          <a:extLst>
-            <a:ext uri="{C572A759-6A51-4108-AA02-DFA0A04FC94B}">
-              <ma14:wrappingTextBoxFlag xmlns:ma14="http://schemas.microsoft.com/office/mac/drawingml/2011/main" val="1"/>
-            </a:ext>
-          </a:extLst>
-        </p:spPr>
-        <p:txBody>
-          <a:bodyPr wrap="none" lIns="0" tIns="0" rIns="0" bIns="0">
-            <a:spAutoFit/>
-          </a:bodyPr>
-          <a:lstStyle/>
-          <a:p>
-            <a:pPr>
-              <a:lnSpc>
-                <a:spcPts val="1600"/>
-              </a:lnSpc>
-              <a:defRPr sz="1100">
-                <a:solidFill>
-                  <a:srgbClr val="888888"/>
-                </a:solidFill>
-                <a:latin typeface="JetBrains Mono Regular"/>
-                <a:ea typeface="JetBrains Mono Regular"/>
-                <a:cs typeface="JetBrains Mono Regular"/>
-                <a:sym typeface="JetBrains Mono Regular"/>
-              </a:defRPr>
-            </a:pPr>
-            <a:r>
-              <a:t>// features/auth/index.ts</a:t>
-            </a:r>
-          </a:p>
-          <a:p>
-            <a:pPr>
-              <a:lnSpc>
-                <a:spcPts val="1600"/>
-              </a:lnSpc>
-              <a:defRPr sz="1100">
-                <a:solidFill>
-                  <a:srgbClr val="00D4FF"/>
-                </a:solidFill>
-                <a:latin typeface="JetBrains Mono Regular"/>
-                <a:ea typeface="JetBrains Mono Regular"/>
-                <a:cs typeface="JetBrains Mono Regular"/>
-                <a:sym typeface="JetBrains Mono Regular"/>
-              </a:defRPr>
-            </a:pPr>
-            <a:r>
-              <a:t>export </a:t>
-            </a:r>
-            <a:r>
-              <a:rPr>
-                <a:solidFill>
-                  <a:srgbClr val="F2F2F2"/>
-                </a:solidFill>
-              </a:rPr>
-              <a:t>{ LoginForm } from './ui/LoginForm'</a:t>
-            </a:r>
-            <a:endParaRPr>
-              <a:solidFill>
-                <a:srgbClr val="F2F2F2"/>
-              </a:solidFill>
-            </a:endParaRPr>
-          </a:p>
-          <a:p>
-            <a:pPr>
-              <a:lnSpc>
-                <a:spcPts val="1600"/>
-              </a:lnSpc>
-              <a:defRPr sz="1100">
-                <a:solidFill>
-                  <a:srgbClr val="00D4FF"/>
-                </a:solidFill>
-                <a:latin typeface="JetBrains Mono Regular"/>
-                <a:ea typeface="JetBrains Mono Regular"/>
-                <a:cs typeface="JetBrains Mono Regular"/>
-                <a:sym typeface="JetBrains Mono Regular"/>
-              </a:defRPr>
-            </a:pPr>
-            <a:r>
-              <a:t>export </a:t>
-            </a:r>
-            <a:r>
-              <a:rPr>
-                <a:solidFill>
-                  <a:srgbClr val="F2F2F2"/>
-                </a:solidFill>
-              </a:rPr>
-              <a:t>{ useAuth } from './model/auth-store'</a:t>
-            </a:r>
-            <a:endParaRPr>
-              <a:solidFill>
-                <a:srgbClr val="F2F2F2"/>
-              </a:solidFill>
-            </a:endParaRPr>
-          </a:p>
-          <a:p>
-            <a:pPr>
-              <a:lnSpc>
-                <a:spcPts val="1600"/>
-              </a:lnSpc>
-              <a:defRPr sz="1100">
-                <a:solidFill>
-                  <a:srgbClr val="FFFFFF"/>
-                </a:solidFill>
-                <a:latin typeface="JetBrains Mono Regular"/>
-                <a:ea typeface="JetBrains Mono Regular"/>
-                <a:cs typeface="JetBrains Mono Regular"/>
-                <a:sym typeface="JetBrains Mono Regular"/>
-              </a:defRPr>
-            </a:pPr>
-            <a:r>
-              <a:t> </a:t>
-            </a:r>
-          </a:p>
-          <a:p>
-            <a:pPr>
-              <a:lnSpc>
-                <a:spcPts val="1600"/>
-              </a:lnSpc>
-              <a:defRPr sz="1100">
-                <a:solidFill>
-                  <a:srgbClr val="888888"/>
-                </a:solidFill>
-                <a:latin typeface="JetBrains Mono Regular"/>
-                <a:ea typeface="JetBrains Mono Regular"/>
-                <a:cs typeface="JetBrains Mono Regular"/>
-                <a:sym typeface="JetBrains Mono Regular"/>
-              </a:defRPr>
-            </a:pPr>
-            <a:r>
-              <a:t>// Svugdje drugdje:</a:t>
-            </a:r>
-          </a:p>
-          <a:p>
-            <a:pPr>
-              <a:lnSpc>
-                <a:spcPts val="1600"/>
-              </a:lnSpc>
-              <a:defRPr sz="1100">
-                <a:solidFill>
-                  <a:srgbClr val="2ED573"/>
-                </a:solidFill>
-                <a:latin typeface="JetBrains Mono Regular"/>
-                <a:ea typeface="JetBrains Mono Regular"/>
-                <a:cs typeface="JetBrains Mono Regular"/>
-                <a:sym typeface="JetBrains Mono Regular"/>
-              </a:defRPr>
-            </a:pPr>
-            <a:r>
-              <a:t>import { LoginForm } from '@/features/auth'</a:t>
-            </a:r>
-          </a:p>
-          <a:p>
-            <a:pPr>
-              <a:lnSpc>
-                <a:spcPts val="1600"/>
-              </a:lnSpc>
-              <a:defRPr sz="1100">
-                <a:solidFill>
-                  <a:srgbClr val="FFFFFF"/>
-                </a:solidFill>
-                <a:latin typeface="JetBrains Mono Regular"/>
-                <a:ea typeface="JetBrains Mono Regular"/>
-                <a:cs typeface="JetBrains Mono Regular"/>
-                <a:sym typeface="JetBrains Mono Regular"/>
-              </a:defRPr>
-            </a:pPr>
-            <a:r>
-              <a:t> </a:t>
-            </a:r>
-          </a:p>
-          <a:p>
-            <a:pPr>
-              <a:lnSpc>
-                <a:spcPts val="1600"/>
-              </a:lnSpc>
-              <a:defRPr sz="1100">
-                <a:solidFill>
-                  <a:srgbClr val="FF6B81"/>
-                </a:solidFill>
-                <a:latin typeface="JetBrains Mono Regular"/>
-                <a:ea typeface="JetBrains Mono Regular"/>
-                <a:cs typeface="JetBrains Mono Regular"/>
-                <a:sym typeface="JetBrains Mono Regular"/>
-              </a:defRPr>
-            </a:pPr>
-            <a:r>
-              <a:t>// Zabranjeno:</a:t>
-            </a:r>
-          </a:p>
-          <a:p>
-            <a:pPr>
-              <a:lnSpc>
-                <a:spcPts val="1600"/>
-              </a:lnSpc>
-              <a:defRPr sz="1100">
-                <a:solidFill>
-                  <a:srgbClr val="FF6B81"/>
-                </a:solidFill>
-                <a:latin typeface="JetBrains Mono Regular"/>
-                <a:ea typeface="JetBrains Mono Regular"/>
-                <a:cs typeface="JetBrains Mono Regular"/>
-                <a:sym typeface="JetBrains Mono Regular"/>
-              </a:defRPr>
-            </a:pPr>
-            <a:r>
-              <a:t>import { LoginForm } from '@/features/auth/ui/LoginForm'</a:t>
-            </a:r>
-          </a:p>
-        </p:txBody>
-      </p:sp>
-      <p:sp>
-        <p:nvSpPr>
-          <p:cNvPr id="413" name="Rounded Rectangle 8"/>
-          <p:cNvSpPr/>
-          <p:nvPr/>
-        </p:nvSpPr>
-        <p:spPr>
-          <a:xfrm>
-            <a:off x="640080" y="5440679"/>
-            <a:ext cx="10972801" cy="1005841"/>
-          </a:xfrm>
-          <a:prstGeom prst="roundRect">
-            <a:avLst>
-              <a:gd name="adj" fmla="val 8000"/>
-            </a:avLst>
-          </a:prstGeom>
-          <a:solidFill>
-            <a:srgbClr val="0E3A47"/>
-          </a:solidFill>
-          <a:ln w="12700">
-            <a:miter lim="400000"/>
-          </a:ln>
-        </p:spPr>
-        <p:txBody>
-          <a:bodyPr lIns="45718" tIns="45718" rIns="45718" bIns="45718" anchor="ctr"/>
-          <a:lstStyle/>
-          <a:p>
-            <a:pPr algn="ctr">
-              <a:defRPr>
-                <a:solidFill>
-                  <a:srgbClr val="FFFFFF"/>
-                </a:solidFill>
-              </a:defRPr>
-            </a:pPr>
-          </a:p>
-        </p:txBody>
-      </p:sp>
-      <p:sp>
-        <p:nvSpPr>
-          <p:cNvPr id="414" name="Rectangle 9"/>
-          <p:cNvSpPr/>
-          <p:nvPr/>
-        </p:nvSpPr>
-        <p:spPr>
-          <a:xfrm>
-            <a:off x="640080" y="5440679"/>
-            <a:ext cx="54865" cy="1005840"/>
-          </a:xfrm>
-          <a:prstGeom prst="rect">
-            <a:avLst/>
-          </a:prstGeom>
-          <a:solidFill>
-            <a:srgbClr val="00D4FF"/>
-          </a:solidFill>
-          <a:ln w="12700">
-            <a:miter lim="400000"/>
-          </a:ln>
-        </p:spPr>
-        <p:txBody>
-          <a:bodyPr lIns="45718" tIns="45718" rIns="45718" bIns="45718" anchor="ctr"/>
-          <a:lstStyle/>
-          <a:p>
-            <a:pPr algn="ctr">
-              <a:defRPr>
-                <a:solidFill>
-                  <a:srgbClr val="FFFFFF"/>
-                </a:solidFill>
-              </a:defRPr>
-            </a:pPr>
-          </a:p>
-        </p:txBody>
-      </p:sp>
-      <p:sp>
-        <p:nvSpPr>
-          <p:cNvPr id="415" name="TextBox 10"/>
-          <p:cNvSpPr txBox="1"/>
-          <p:nvPr/>
-        </p:nvSpPr>
-        <p:spPr>
-          <a:xfrm>
-            <a:off x="914400" y="5623559"/>
-            <a:ext cx="10515600" cy="495301"/>
-          </a:xfrm>
-          <a:prstGeom prst="rect">
-            <a:avLst/>
-          </a:prstGeom>
-          <a:ln w="12700">
-            <a:miter lim="400000"/>
-          </a:ln>
-          <a:extLst>
-            <a:ext uri="{C572A759-6A51-4108-AA02-DFA0A04FC94B}">
-              <ma14:wrappingTextBoxFlag xmlns:ma14="http://schemas.microsoft.com/office/mac/drawingml/2011/main" val="1"/>
-            </a:ext>
-          </a:extLst>
-        </p:spPr>
-        <p:txBody>
           <a:bodyPr lIns="0" tIns="0" rIns="0" bIns="0">
             <a:spAutoFit/>
           </a:bodyPr>
           <a:lstStyle/>
           <a:p>
             <a:pPr>
-              <a:defRPr sz="1500">
+              <a:defRPr>
                 <a:solidFill>
                   <a:srgbClr val="FFFFFF"/>
                 </a:solidFill>
@@ -17150,22 +18424,7 @@
               </a:defRPr>
             </a:pPr>
             <a:r>
-              <a:t>AI pročita </a:t>
-            </a:r>
-            <a:r>
-              <a:rPr>
-                <a:solidFill>
-                  <a:srgbClr val="00D4FF"/>
-                </a:solidFill>
-                <a:latin typeface="JetBrains Mono Regular"/>
-                <a:ea typeface="JetBrains Mono Regular"/>
-                <a:cs typeface="JetBrains Mono Regular"/>
-                <a:sym typeface="JetBrains Mono Regular"/>
-              </a:rPr>
-              <a:t>index.ts</a:t>
-            </a:r>
-            <a:r>
-              <a:t> (8 redova) i zna kompletno sučelje slice-a — umjesto da učita 400+ linija interne implementacije. </a:t>
+              <a:t>Dobra arhitektura + dobra dokumentacija u kontekstu = AI prestaje halucinirati i počinje pisati kod </a:t>
             </a:r>
             <a:r>
               <a:rPr>
@@ -17177,7 +18436,10 @@
                 <a:cs typeface="Inter Bold"/>
                 <a:sym typeface="Inter Bold"/>
               </a:rPr>
-              <a:t>Štedi tokene, stabilan ugovor.</a:t>
+              <a:t>po pravilima projekta</a:t>
+            </a:r>
+            <a:r>
+              <a:t>.</a:t>
             </a:r>
           </a:p>
         </p:txBody>
@@ -17191,667 +18453,7 @@
 </p:sld>
 </file>
 
-<file path=ppt/slides/slide31.xml><?xml version="1.0" encoding="utf-8"?>
-<p:sld xmlns:a="http://schemas.openxmlformats.org/drawingml/2006/main" xmlns:r="http://schemas.openxmlformats.org/officeDocument/2006/relationships" xmlns:p="http://schemas.openxmlformats.org/presentationml/2006/main" xmlns:m="http://schemas.openxmlformats.org/officeDocument/2006/math" xmlns:a14="http://schemas.microsoft.com/office/drawing/2010/main" showMasterSp="1" showMasterPhAnim="1">
-  <p:cSld>
-    <p:spTree>
-      <p:nvGrpSpPr>
-        <p:cNvPr id="1" name=""/>
-        <p:cNvGrpSpPr/>
-        <p:nvPr/>
-      </p:nvGrpSpPr>
-      <p:grpSpPr>
-        <a:xfrm>
-          <a:off x="0" y="0"/>
-          <a:ext cx="0" cy="0"/>
-          <a:chOff x="0" y="0"/>
-          <a:chExt cx="0" cy="0"/>
-        </a:xfrm>
-      </p:grpSpPr>
-      <p:sp>
-        <p:nvSpPr>
-          <p:cNvPr id="419" name="TextBox 1"/>
-          <p:cNvSpPr txBox="1"/>
-          <p:nvPr/>
-        </p:nvSpPr>
-        <p:spPr>
-          <a:xfrm>
-            <a:off x="640079" y="502919"/>
-            <a:ext cx="10908794" cy="558801"/>
-          </a:xfrm>
-          <a:prstGeom prst="rect">
-            <a:avLst/>
-          </a:prstGeom>
-          <a:ln w="12700">
-            <a:miter lim="400000"/>
-          </a:ln>
-          <a:extLst>
-            <a:ext uri="{C572A759-6A51-4108-AA02-DFA0A04FC94B}">
-              <ma14:wrappingTextBoxFlag xmlns:ma14="http://schemas.microsoft.com/office/mac/drawingml/2011/main" val="1"/>
-            </a:ext>
-          </a:extLst>
-        </p:spPr>
-        <p:txBody>
-          <a:bodyPr lIns="0" tIns="0" rIns="0" bIns="0">
-            <a:spAutoFit/>
-          </a:bodyPr>
-          <a:lstStyle/>
-          <a:p>
-            <a:pPr>
-              <a:defRPr sz="3600">
-                <a:solidFill>
-                  <a:srgbClr val="FFFFFF"/>
-                </a:solidFill>
-                <a:latin typeface="Inter Bold"/>
-                <a:ea typeface="Inter Bold"/>
-                <a:cs typeface="Inter Bold"/>
-                <a:sym typeface="Inter Bold"/>
-              </a:defRPr>
-            </a:pPr>
-            <a:r>
-              <a:t>AI alati </a:t>
-            </a:r>
-            <a:r>
-              <a:rPr>
-                <a:solidFill>
-                  <a:srgbClr val="00D4FF"/>
-                </a:solidFill>
-              </a:rPr>
-              <a:t>za FSD</a:t>
-            </a:r>
-          </a:p>
-        </p:txBody>
-      </p:sp>
-      <p:sp>
-        <p:nvSpPr>
-          <p:cNvPr id="420" name="TextBox 2"/>
-          <p:cNvSpPr txBox="1"/>
-          <p:nvPr/>
-        </p:nvSpPr>
-        <p:spPr>
-          <a:xfrm>
-            <a:off x="640079" y="1371600"/>
-            <a:ext cx="10908794" cy="215900"/>
-          </a:xfrm>
-          <a:prstGeom prst="rect">
-            <a:avLst/>
-          </a:prstGeom>
-          <a:ln w="12700">
-            <a:miter lim="400000"/>
-          </a:ln>
-          <a:extLst>
-            <a:ext uri="{C572A759-6A51-4108-AA02-DFA0A04FC94B}">
-              <ma14:wrappingTextBoxFlag xmlns:ma14="http://schemas.microsoft.com/office/mac/drawingml/2011/main" val="1"/>
-            </a:ext>
-          </a:extLst>
-        </p:spPr>
-        <p:txBody>
-          <a:bodyPr lIns="0" tIns="0" rIns="0" bIns="0">
-            <a:spAutoFit/>
-          </a:bodyPr>
-          <a:lstStyle>
-            <a:lvl1pPr>
-              <a:defRPr sz="1400">
-                <a:solidFill>
-                  <a:srgbClr val="888888"/>
-                </a:solidFill>
-                <a:latin typeface="Inter Regular"/>
-                <a:ea typeface="Inter Regular"/>
-                <a:cs typeface="Inter Regular"/>
-                <a:sym typeface="Inter Regular"/>
-              </a:defRPr>
-            </a:lvl1pPr>
-          </a:lstStyle>
-          <a:p>
-            <a:pPr/>
-            <a:r>
-              <a:t>Daj AI-u FSD dokumentaciju kao kontekst — ne mora pogađati pravila.</a:t>
-            </a:r>
-          </a:p>
-        </p:txBody>
-      </p:sp>
-      <p:sp>
-        <p:nvSpPr>
-          <p:cNvPr id="421" name="Rectangle 3"/>
-          <p:cNvSpPr/>
-          <p:nvPr/>
-        </p:nvSpPr>
-        <p:spPr>
-          <a:xfrm>
-            <a:off x="640080" y="1691639"/>
-            <a:ext cx="548641" cy="36577"/>
-          </a:xfrm>
-          <a:prstGeom prst="rect">
-            <a:avLst/>
-          </a:prstGeom>
-          <a:solidFill>
-            <a:srgbClr val="00D4FF"/>
-          </a:solidFill>
-          <a:ln w="12700">
-            <a:miter lim="400000"/>
-          </a:ln>
-        </p:spPr>
-        <p:txBody>
-          <a:bodyPr lIns="45718" tIns="45718" rIns="45718" bIns="45718" anchor="ctr"/>
-          <a:lstStyle/>
-          <a:p>
-            <a:pPr algn="ctr">
-              <a:defRPr>
-                <a:solidFill>
-                  <a:srgbClr val="FFFFFF"/>
-                </a:solidFill>
-              </a:defRPr>
-            </a:pPr>
-          </a:p>
-        </p:txBody>
-      </p:sp>
-      <p:sp>
-        <p:nvSpPr>
-          <p:cNvPr id="422" name="TextBox 4"/>
-          <p:cNvSpPr txBox="1"/>
-          <p:nvPr/>
-        </p:nvSpPr>
-        <p:spPr>
-          <a:xfrm>
-            <a:off x="640080" y="2194560"/>
-            <a:ext cx="5486401" cy="266701"/>
-          </a:xfrm>
-          <a:prstGeom prst="rect">
-            <a:avLst/>
-          </a:prstGeom>
-          <a:ln w="12700">
-            <a:miter lim="400000"/>
-          </a:ln>
-          <a:extLst>
-            <a:ext uri="{C572A759-6A51-4108-AA02-DFA0A04FC94B}">
-              <ma14:wrappingTextBoxFlag xmlns:ma14="http://schemas.microsoft.com/office/mac/drawingml/2011/main" val="1"/>
-            </a:ext>
-          </a:extLst>
-        </p:spPr>
-        <p:txBody>
-          <a:bodyPr lIns="0" tIns="0" rIns="0" bIns="0">
-            <a:spAutoFit/>
-          </a:bodyPr>
-          <a:lstStyle>
-            <a:lvl1pPr>
-              <a:defRPr>
-                <a:solidFill>
-                  <a:srgbClr val="00D4FF"/>
-                </a:solidFill>
-                <a:latin typeface="Inter Bold"/>
-                <a:ea typeface="Inter Bold"/>
-                <a:cs typeface="Inter Bold"/>
-                <a:sym typeface="Inter Bold"/>
-              </a:defRPr>
-            </a:lvl1pPr>
-          </a:lstStyle>
-          <a:p>
-            <a:pPr/>
-            <a:r>
-              <a:t>LLMs.txt</a:t>
-            </a:r>
-          </a:p>
-        </p:txBody>
-      </p:sp>
-      <p:sp>
-        <p:nvSpPr>
-          <p:cNvPr id="423" name="TextBox 5"/>
-          <p:cNvSpPr txBox="1"/>
-          <p:nvPr/>
-        </p:nvSpPr>
-        <p:spPr>
-          <a:xfrm>
-            <a:off x="640080" y="2606039"/>
-            <a:ext cx="5486401" cy="228601"/>
-          </a:xfrm>
-          <a:prstGeom prst="rect">
-            <a:avLst/>
-          </a:prstGeom>
-          <a:ln w="12700">
-            <a:miter lim="400000"/>
-          </a:ln>
-          <a:extLst>
-            <a:ext uri="{C572A759-6A51-4108-AA02-DFA0A04FC94B}">
-              <ma14:wrappingTextBoxFlag xmlns:ma14="http://schemas.microsoft.com/office/mac/drawingml/2011/main" val="1"/>
-            </a:ext>
-          </a:extLst>
-        </p:spPr>
-        <p:txBody>
-          <a:bodyPr lIns="0" tIns="0" rIns="0" bIns="0">
-            <a:spAutoFit/>
-          </a:bodyPr>
-          <a:lstStyle>
-            <a:lvl1pPr>
-              <a:defRPr sz="1400">
-                <a:solidFill>
-                  <a:srgbClr val="F2F2F2"/>
-                </a:solidFill>
-                <a:latin typeface="JetBrains Mono Regular"/>
-                <a:ea typeface="JetBrains Mono Regular"/>
-                <a:cs typeface="JetBrains Mono Regular"/>
-                <a:sym typeface="JetBrains Mono Regular"/>
-              </a:defRPr>
-            </a:lvl1pPr>
-          </a:lstStyle>
-          <a:p>
-            <a:pPr/>
-            <a:r>
-              <a:t>fsd.how/llms-full.txt</a:t>
-            </a:r>
-          </a:p>
-        </p:txBody>
-      </p:sp>
-      <p:sp>
-        <p:nvSpPr>
-          <p:cNvPr id="424" name="TextBox 6"/>
-          <p:cNvSpPr txBox="1"/>
-          <p:nvPr/>
-        </p:nvSpPr>
-        <p:spPr>
-          <a:xfrm>
-            <a:off x="640080" y="3154679"/>
-            <a:ext cx="5486401" cy="977901"/>
-          </a:xfrm>
-          <a:prstGeom prst="rect">
-            <a:avLst/>
-          </a:prstGeom>
-          <a:ln w="12700">
-            <a:miter lim="400000"/>
-          </a:ln>
-          <a:extLst>
-            <a:ext uri="{C572A759-6A51-4108-AA02-DFA0A04FC94B}">
-              <ma14:wrappingTextBoxFlag xmlns:ma14="http://schemas.microsoft.com/office/mac/drawingml/2011/main" val="1"/>
-            </a:ext>
-          </a:extLst>
-        </p:spPr>
-        <p:txBody>
-          <a:bodyPr lIns="0" tIns="0" rIns="0" bIns="0">
-            <a:spAutoFit/>
-          </a:bodyPr>
-          <a:lstStyle/>
-          <a:p>
-            <a:pPr>
-              <a:defRPr sz="1400">
-                <a:solidFill>
-                  <a:srgbClr val="FFFFFF"/>
-                </a:solidFill>
-                <a:latin typeface="Inter Regular"/>
-                <a:ea typeface="Inter Regular"/>
-                <a:cs typeface="Inter Regular"/>
-                <a:sym typeface="Inter Regular"/>
-              </a:defRPr>
-            </a:pPr>
-            <a:r>
-              <a:t>Cijela FSD specifikacija u jednom plain-text fileu — formatirana baš tako da je AI agenti mogu lako progutati.</a:t>
-            </a:r>
-          </a:p>
-          <a:p>
-            <a:pPr>
-              <a:spcBef>
-                <a:spcPts val="800"/>
-              </a:spcBef>
-              <a:defRPr sz="1400">
-                <a:solidFill>
-                  <a:srgbClr val="FFFFFF"/>
-                </a:solidFill>
-                <a:latin typeface="Inter Regular"/>
-                <a:ea typeface="Inter Regular"/>
-                <a:cs typeface="Inter Regular"/>
-                <a:sym typeface="Inter Regular"/>
-              </a:defRPr>
-            </a:pPr>
-            <a:r>
-              <a:t>Doda se u </a:t>
-            </a:r>
-            <a:r>
-              <a:rPr>
-                <a:solidFill>
-                  <a:srgbClr val="00D4FF"/>
-                </a:solidFill>
-                <a:latin typeface="JetBrains Mono Regular"/>
-                <a:ea typeface="JetBrains Mono Regular"/>
-                <a:cs typeface="JetBrains Mono Regular"/>
-                <a:sym typeface="JetBrains Mono Regular"/>
-              </a:rPr>
-              <a:t>CLAUDE.md</a:t>
-            </a:r>
-            <a:r>
-              <a:t> / </a:t>
-            </a:r>
-            <a:r>
-              <a:rPr>
-                <a:solidFill>
-                  <a:srgbClr val="00D4FF"/>
-                </a:solidFill>
-                <a:latin typeface="JetBrains Mono Regular"/>
-                <a:ea typeface="JetBrains Mono Regular"/>
-                <a:cs typeface="JetBrains Mono Regular"/>
-                <a:sym typeface="JetBrains Mono Regular"/>
-              </a:rPr>
-              <a:t>AGENTS.md</a:t>
-            </a:r>
-            <a:r>
-              <a:t> ili kao referenca u promptu — AI dobiva pravila prije nego napiše ijednu liniju.</a:t>
-            </a:r>
-          </a:p>
-        </p:txBody>
-      </p:sp>
-      <p:sp>
-        <p:nvSpPr>
-          <p:cNvPr id="425" name="TextBox 7"/>
-          <p:cNvSpPr txBox="1"/>
-          <p:nvPr/>
-        </p:nvSpPr>
-        <p:spPr>
-          <a:xfrm>
-            <a:off x="6400800" y="2194560"/>
-            <a:ext cx="5486400" cy="266701"/>
-          </a:xfrm>
-          <a:prstGeom prst="rect">
-            <a:avLst/>
-          </a:prstGeom>
-          <a:ln w="12700">
-            <a:miter lim="400000"/>
-          </a:ln>
-          <a:extLst>
-            <a:ext uri="{C572A759-6A51-4108-AA02-DFA0A04FC94B}">
-              <ma14:wrappingTextBoxFlag xmlns:ma14="http://schemas.microsoft.com/office/mac/drawingml/2011/main" val="1"/>
-            </a:ext>
-          </a:extLst>
-        </p:spPr>
-        <p:txBody>
-          <a:bodyPr lIns="0" tIns="0" rIns="0" bIns="0">
-            <a:spAutoFit/>
-          </a:bodyPr>
-          <a:lstStyle>
-            <a:lvl1pPr>
-              <a:defRPr>
-                <a:solidFill>
-                  <a:srgbClr val="00D4FF"/>
-                </a:solidFill>
-                <a:latin typeface="Inter Bold"/>
-                <a:ea typeface="Inter Bold"/>
-                <a:cs typeface="Inter Bold"/>
-                <a:sym typeface="Inter Bold"/>
-              </a:defRPr>
-            </a:lvl1pPr>
-          </a:lstStyle>
-          <a:p>
-            <a:pPr/>
-            <a:r>
-              <a:t>feature-sliced-design Skill</a:t>
-            </a:r>
-          </a:p>
-        </p:txBody>
-      </p:sp>
-      <p:sp>
-        <p:nvSpPr>
-          <p:cNvPr id="426" name="TextBox 8"/>
-          <p:cNvSpPr txBox="1"/>
-          <p:nvPr/>
-        </p:nvSpPr>
-        <p:spPr>
-          <a:xfrm>
-            <a:off x="6400800" y="2606039"/>
-            <a:ext cx="5486400" cy="228601"/>
-          </a:xfrm>
-          <a:prstGeom prst="rect">
-            <a:avLst/>
-          </a:prstGeom>
-          <a:ln w="12700">
-            <a:miter lim="400000"/>
-          </a:ln>
-          <a:extLst>
-            <a:ext uri="{C572A759-6A51-4108-AA02-DFA0A04FC94B}">
-              <ma14:wrappingTextBoxFlag xmlns:ma14="http://schemas.microsoft.com/office/mac/drawingml/2011/main" val="1"/>
-            </a:ext>
-          </a:extLst>
-        </p:spPr>
-        <p:txBody>
-          <a:bodyPr lIns="0" tIns="0" rIns="0" bIns="0">
-            <a:spAutoFit/>
-          </a:bodyPr>
-          <a:lstStyle>
-            <a:lvl1pPr>
-              <a:defRPr sz="1400">
-                <a:solidFill>
-                  <a:srgbClr val="F2F2F2"/>
-                </a:solidFill>
-                <a:latin typeface="JetBrains Mono Regular"/>
-                <a:ea typeface="JetBrains Mono Regular"/>
-                <a:cs typeface="JetBrains Mono Regular"/>
-                <a:sym typeface="JetBrains Mono Regular"/>
-              </a:defRPr>
-            </a:lvl1pPr>
-          </a:lstStyle>
-          <a:p>
-            <a:pPr/>
-            <a:r>
-              <a:t>/feature-sliced-design</a:t>
-            </a:r>
-          </a:p>
-        </p:txBody>
-      </p:sp>
-      <p:sp>
-        <p:nvSpPr>
-          <p:cNvPr id="427" name="TextBox 9"/>
-          <p:cNvSpPr txBox="1"/>
-          <p:nvPr/>
-        </p:nvSpPr>
-        <p:spPr>
-          <a:xfrm>
-            <a:off x="6400800" y="3154679"/>
-            <a:ext cx="5486400" cy="1181101"/>
-          </a:xfrm>
-          <a:prstGeom prst="rect">
-            <a:avLst/>
-          </a:prstGeom>
-          <a:ln w="12700">
-            <a:miter lim="400000"/>
-          </a:ln>
-          <a:extLst>
-            <a:ext uri="{C572A759-6A51-4108-AA02-DFA0A04FC94B}">
-              <ma14:wrappingTextBoxFlag xmlns:ma14="http://schemas.microsoft.com/office/mac/drawingml/2011/main" val="1"/>
-            </a:ext>
-          </a:extLst>
-        </p:spPr>
-        <p:txBody>
-          <a:bodyPr lIns="0" tIns="0" rIns="0" bIns="0">
-            <a:spAutoFit/>
-          </a:bodyPr>
-          <a:lstStyle/>
-          <a:p>
-            <a:pPr>
-              <a:defRPr sz="1400">
-                <a:solidFill>
-                  <a:srgbClr val="FFFFFF"/>
-                </a:solidFill>
-                <a:latin typeface="Inter Regular"/>
-                <a:ea typeface="Inter Regular"/>
-                <a:cs typeface="Inter Regular"/>
-                <a:sym typeface="Inter Regular"/>
-              </a:defRPr>
-            </a:pPr>
-            <a:r>
-              <a:t>Službeni Claude Code skill — aktivira se automatski kad se radi o FSD strukturi (gdje datoteku staviti, public API, cross-import, segmenti).</a:t>
-            </a:r>
-          </a:p>
-          <a:p>
-            <a:pPr>
-              <a:spcBef>
-                <a:spcPts val="800"/>
-              </a:spcBef>
-              <a:defRPr sz="1400">
-                <a:solidFill>
-                  <a:srgbClr val="FFFFFF"/>
-                </a:solidFill>
-                <a:latin typeface="Inter Regular"/>
-                <a:ea typeface="Inter Regular"/>
-                <a:cs typeface="Inter Regular"/>
-                <a:sym typeface="Inter Regular"/>
-              </a:defRPr>
-            </a:pPr>
-            <a:r>
-              <a:t>Sadrži decision tree, anti-patterne i conditional reference fileove </a:t>
-            </a:r>
-            <a:r>
-              <a:rPr>
-                <a:solidFill>
-                  <a:srgbClr val="00D4FF"/>
-                </a:solidFill>
-                <a:latin typeface="Inter Bold"/>
-                <a:ea typeface="Inter Bold"/>
-                <a:cs typeface="Inter Bold"/>
-                <a:sym typeface="Inter Bold"/>
-              </a:rPr>
-              <a:t>— zna kada koje znanje učitati u kontekst.</a:t>
-            </a:r>
-          </a:p>
-        </p:txBody>
-      </p:sp>
-      <p:sp>
-        <p:nvSpPr>
-          <p:cNvPr id="428" name="Rounded Rectangle 10"/>
-          <p:cNvSpPr/>
-          <p:nvPr/>
-        </p:nvSpPr>
-        <p:spPr>
-          <a:xfrm>
-            <a:off x="640080" y="5074920"/>
-            <a:ext cx="10972801" cy="1188721"/>
-          </a:xfrm>
-          <a:prstGeom prst="roundRect">
-            <a:avLst>
-              <a:gd name="adj" fmla="val 8000"/>
-            </a:avLst>
-          </a:prstGeom>
-          <a:solidFill>
-            <a:srgbClr val="0E3A47"/>
-          </a:solidFill>
-          <a:ln w="12700">
-            <a:miter lim="400000"/>
-          </a:ln>
-        </p:spPr>
-        <p:txBody>
-          <a:bodyPr lIns="45718" tIns="45718" rIns="45718" bIns="45718" anchor="ctr"/>
-          <a:lstStyle/>
-          <a:p>
-            <a:pPr algn="ctr">
-              <a:defRPr>
-                <a:solidFill>
-                  <a:srgbClr val="FFFFFF"/>
-                </a:solidFill>
-              </a:defRPr>
-            </a:pPr>
-          </a:p>
-        </p:txBody>
-      </p:sp>
-      <p:sp>
-        <p:nvSpPr>
-          <p:cNvPr id="429" name="Rectangle 11"/>
-          <p:cNvSpPr/>
-          <p:nvPr/>
-        </p:nvSpPr>
-        <p:spPr>
-          <a:xfrm>
-            <a:off x="640080" y="5074920"/>
-            <a:ext cx="54865" cy="1188721"/>
-          </a:xfrm>
-          <a:prstGeom prst="rect">
-            <a:avLst/>
-          </a:prstGeom>
-          <a:solidFill>
-            <a:srgbClr val="00D4FF"/>
-          </a:solidFill>
-          <a:ln w="12700">
-            <a:miter lim="400000"/>
-          </a:ln>
-        </p:spPr>
-        <p:txBody>
-          <a:bodyPr lIns="45718" tIns="45718" rIns="45718" bIns="45718" anchor="ctr"/>
-          <a:lstStyle/>
-          <a:p>
-            <a:pPr algn="ctr">
-              <a:defRPr>
-                <a:solidFill>
-                  <a:srgbClr val="FFFFFF"/>
-                </a:solidFill>
-              </a:defRPr>
-            </a:pPr>
-          </a:p>
-        </p:txBody>
-      </p:sp>
-      <p:sp>
-        <p:nvSpPr>
-          <p:cNvPr id="430" name="TextBox 12"/>
-          <p:cNvSpPr txBox="1"/>
-          <p:nvPr/>
-        </p:nvSpPr>
-        <p:spPr>
-          <a:xfrm>
-            <a:off x="914400" y="5257800"/>
-            <a:ext cx="10515600" cy="533400"/>
-          </a:xfrm>
-          <a:prstGeom prst="rect">
-            <a:avLst/>
-          </a:prstGeom>
-          <a:ln w="12700">
-            <a:miter lim="400000"/>
-          </a:ln>
-          <a:extLst>
-            <a:ext uri="{C572A759-6A51-4108-AA02-DFA0A04FC94B}">
-              <ma14:wrappingTextBoxFlag xmlns:ma14="http://schemas.microsoft.com/office/mac/drawingml/2011/main" val="1"/>
-            </a:ext>
-          </a:extLst>
-        </p:spPr>
-        <p:txBody>
-          <a:bodyPr lIns="0" tIns="0" rIns="0" bIns="0">
-            <a:spAutoFit/>
-          </a:bodyPr>
-          <a:lstStyle/>
-          <a:p>
-            <a:pPr>
-              <a:defRPr>
-                <a:solidFill>
-                  <a:srgbClr val="FFFFFF"/>
-                </a:solidFill>
-                <a:latin typeface="Inter Regular"/>
-                <a:ea typeface="Inter Regular"/>
-                <a:cs typeface="Inter Regular"/>
-                <a:sym typeface="Inter Regular"/>
-              </a:defRPr>
-            </a:pPr>
-            <a:r>
-              <a:t>Dobra arhitektura + dobra dokumentacija u kontekstu = AI prestaje halucinirati i počinje pisati kod </a:t>
-            </a:r>
-            <a:r>
-              <a:rPr>
-                <a:solidFill>
-                  <a:srgbClr val="00D4FF"/>
-                </a:solidFill>
-                <a:latin typeface="Inter Bold"/>
-                <a:ea typeface="Inter Bold"/>
-                <a:cs typeface="Inter Bold"/>
-                <a:sym typeface="Inter Bold"/>
-              </a:rPr>
-              <a:t>po pravilima projekta</a:t>
-            </a:r>
-            <a:r>
-              <a:t>.</a:t>
-            </a:r>
-          </a:p>
-        </p:txBody>
-      </p:sp>
-    </p:spTree>
-  </p:cSld>
-  <p:clrMapOvr>
-    <a:masterClrMapping/>
-  </p:clrMapOvr>
-  <p:transition xmlns:p14="http://schemas.microsoft.com/office/powerpoint/2010/main" spd="med" advClick="1"/>
-</p:sld>
-</file>
-
-<file path=ppt/slides/slide32.xml><?xml version="1.0" encoding="utf-8"?>
+<file path=ppt/slides/slide35.xml><?xml version="1.0" encoding="utf-8"?>
 <p:sld xmlns:a="http://schemas.openxmlformats.org/drawingml/2006/main" xmlns:r="http://schemas.openxmlformats.org/officeDocument/2006/relationships" xmlns:p="http://schemas.openxmlformats.org/presentationml/2006/main" xmlns:m="http://schemas.openxmlformats.org/officeDocument/2006/math" xmlns:a14="http://schemas.microsoft.com/office/drawing/2010/main" showMasterSp="1" showMasterPhAnim="1">
   <p:cSld>
     <p:bg>
@@ -17877,7 +18479,7 @@
       </p:grpSpPr>
       <p:sp>
         <p:nvSpPr>
-          <p:cNvPr id="434" name="TextBox 1"/>
+          <p:cNvPr id="450" name="TextBox 1"/>
           <p:cNvSpPr txBox="1"/>
           <p:nvPr/>
         </p:nvSpPr>
@@ -17937,7 +18539,7 @@
       </p:sp>
       <p:sp>
         <p:nvSpPr>
-          <p:cNvPr id="435" name="TextBox 2"/>
+          <p:cNvPr id="451" name="TextBox 2"/>
           <p:cNvSpPr txBox="1"/>
           <p:nvPr/>
         </p:nvSpPr>
@@ -17985,7 +18587,7 @@
       </p:sp>
       <p:sp>
         <p:nvSpPr>
-          <p:cNvPr id="436" name="Rectangle 3"/>
+          <p:cNvPr id="452" name="Rectangle 3"/>
           <p:cNvSpPr/>
           <p:nvPr/>
         </p:nvSpPr>
@@ -18020,7 +18622,7 @@
       </p:sp>
       <p:sp>
         <p:nvSpPr>
-          <p:cNvPr id="437" name="Rectangle 4"/>
+          <p:cNvPr id="453" name="Rectangle 4"/>
           <p:cNvSpPr/>
           <p:nvPr/>
         </p:nvSpPr>
@@ -18055,7 +18657,7 @@
       </p:sp>
       <p:sp>
         <p:nvSpPr>
-          <p:cNvPr id="438" name="TextBox 5"/>
+          <p:cNvPr id="454" name="TextBox 5"/>
           <p:cNvSpPr txBox="1"/>
           <p:nvPr/>
         </p:nvSpPr>
@@ -18103,7 +18705,7 @@
       </p:sp>
       <p:sp>
         <p:nvSpPr>
-          <p:cNvPr id="439" name="TextBox 6"/>
+          <p:cNvPr id="455" name="TextBox 6"/>
           <p:cNvSpPr txBox="1"/>
           <p:nvPr/>
         </p:nvSpPr>
@@ -18151,7 +18753,7 @@
       </p:sp>
       <p:sp>
         <p:nvSpPr>
-          <p:cNvPr id="440" name="Rectangle 7"/>
+          <p:cNvPr id="456" name="Rectangle 7"/>
           <p:cNvSpPr/>
           <p:nvPr/>
         </p:nvSpPr>
@@ -18186,7 +18788,7 @@
       </p:sp>
       <p:sp>
         <p:nvSpPr>
-          <p:cNvPr id="441" name="TextBox 8"/>
+          <p:cNvPr id="457" name="TextBox 8"/>
           <p:cNvSpPr txBox="1"/>
           <p:nvPr/>
         </p:nvSpPr>
@@ -18251,7 +18853,7 @@
       </p:sp>
       <p:sp>
         <p:nvSpPr>
-          <p:cNvPr id="442" name="TextBox 9"/>
+          <p:cNvPr id="458" name="TextBox 9"/>
           <p:cNvSpPr txBox="1"/>
           <p:nvPr/>
         </p:nvSpPr>
@@ -18315,7 +18917,7 @@
       </p:sp>
       <p:sp>
         <p:nvSpPr>
-          <p:cNvPr id="443" name="Rectangle 10"/>
+          <p:cNvPr id="459" name="Rectangle 10"/>
           <p:cNvSpPr/>
           <p:nvPr/>
         </p:nvSpPr>
@@ -18350,7 +18952,7 @@
       </p:sp>
       <p:sp>
         <p:nvSpPr>
-          <p:cNvPr id="444" name="Rectangle 11"/>
+          <p:cNvPr id="460" name="Rectangle 11"/>
           <p:cNvSpPr/>
           <p:nvPr/>
         </p:nvSpPr>
@@ -18385,7 +18987,7 @@
       </p:sp>
       <p:sp>
         <p:nvSpPr>
-          <p:cNvPr id="445" name="TextBox 12"/>
+          <p:cNvPr id="461" name="TextBox 12"/>
           <p:cNvSpPr txBox="1"/>
           <p:nvPr/>
         </p:nvSpPr>
@@ -18450,7 +19052,7 @@
       </p:sp>
       <p:sp>
         <p:nvSpPr>
-          <p:cNvPr id="446" name="TextBox 13"/>
+          <p:cNvPr id="462" name="TextBox 13"/>
           <p:cNvSpPr txBox="1"/>
           <p:nvPr/>
         </p:nvSpPr>
@@ -18511,7 +19113,7 @@
       </p:sp>
       <p:sp>
         <p:nvSpPr>
-          <p:cNvPr id="447" name="Rectangle 14"/>
+          <p:cNvPr id="463" name="Rectangle 14"/>
           <p:cNvSpPr/>
           <p:nvPr/>
         </p:nvSpPr>
@@ -18546,7 +19148,7 @@
       </p:sp>
       <p:sp>
         <p:nvSpPr>
-          <p:cNvPr id="448" name="TextBox 15"/>
+          <p:cNvPr id="464" name="TextBox 15"/>
           <p:cNvSpPr txBox="1"/>
           <p:nvPr/>
         </p:nvSpPr>
@@ -18611,7 +19213,7 @@
       </p:sp>
       <p:sp>
         <p:nvSpPr>
-          <p:cNvPr id="449" name="TextBox 16"/>
+          <p:cNvPr id="465" name="TextBox 16"/>
           <p:cNvSpPr txBox="1"/>
           <p:nvPr/>
         </p:nvSpPr>
@@ -18675,7 +19277,7 @@
       </p:sp>
       <p:sp>
         <p:nvSpPr>
-          <p:cNvPr id="450" name="Rectangle 17"/>
+          <p:cNvPr id="466" name="Rectangle 17"/>
           <p:cNvSpPr/>
           <p:nvPr/>
         </p:nvSpPr>
@@ -18710,7 +19312,7 @@
       </p:sp>
       <p:sp>
         <p:nvSpPr>
-          <p:cNvPr id="451" name="Rectangle 18"/>
+          <p:cNvPr id="467" name="Rectangle 18"/>
           <p:cNvSpPr/>
           <p:nvPr/>
         </p:nvSpPr>
@@ -18745,7 +19347,7 @@
       </p:sp>
       <p:sp>
         <p:nvSpPr>
-          <p:cNvPr id="452" name="TextBox 19"/>
+          <p:cNvPr id="468" name="TextBox 19"/>
           <p:cNvSpPr txBox="1"/>
           <p:nvPr/>
         </p:nvSpPr>
@@ -18810,7 +19412,7 @@
       </p:sp>
       <p:sp>
         <p:nvSpPr>
-          <p:cNvPr id="453" name="TextBox 20"/>
+          <p:cNvPr id="469" name="TextBox 20"/>
           <p:cNvSpPr txBox="1"/>
           <p:nvPr/>
         </p:nvSpPr>
@@ -18874,7 +19476,7 @@
       </p:sp>
       <p:sp>
         <p:nvSpPr>
-          <p:cNvPr id="454" name="Rectangle 21"/>
+          <p:cNvPr id="470" name="Rectangle 21"/>
           <p:cNvSpPr/>
           <p:nvPr/>
         </p:nvSpPr>
@@ -18909,7 +19511,7 @@
       </p:sp>
       <p:sp>
         <p:nvSpPr>
-          <p:cNvPr id="455" name="TextBox 22"/>
+          <p:cNvPr id="471" name="TextBox 22"/>
           <p:cNvSpPr txBox="1"/>
           <p:nvPr/>
         </p:nvSpPr>
@@ -18974,7 +19576,7 @@
       </p:sp>
       <p:sp>
         <p:nvSpPr>
-          <p:cNvPr id="456" name="TextBox 23"/>
+          <p:cNvPr id="472" name="TextBox 23"/>
           <p:cNvSpPr txBox="1"/>
           <p:nvPr/>
         </p:nvSpPr>
